--- a/docs/pptx/entire/ritu-entire-linsubhr-disc-grade3.pptx
+++ b/docs/pptx/entire/ritu-entire-linsubhr-disc-grade3.pptx
@@ -3046,581 +3046,581 @@
           <p:spPr>
             <a:xfrm>
               <a:off x="1172049" y="2073503"/>
-              <a:ext cx="7090630" cy="3120596"/>
+              <a:ext cx="7090630" cy="3121994"/>
             </a:xfrm>
             <a:custGeom>
               <a:avLst/>
               <a:pathLst>
-                <a:path w="7090630" h="3120596">
+                <a:path w="7090630" h="3121994">
                   <a:moveTo>
-                    <a:pt x="726298" y="0"/>
+                    <a:pt x="745178" y="0"/>
                   </a:moveTo>
                   <a:lnTo>
-                    <a:pt x="787847" y="75482"/>
-                  </a:lnTo>
-                  <a:lnTo>
-                    <a:pt x="859470" y="161110"/>
-                  </a:lnTo>
-                  <a:lnTo>
-                    <a:pt x="931092" y="244588"/>
-                  </a:lnTo>
-                  <a:lnTo>
-                    <a:pt x="1002715" y="325968"/>
-                  </a:lnTo>
-                  <a:lnTo>
-                    <a:pt x="1074337" y="405303"/>
-                  </a:lnTo>
-                  <a:lnTo>
-                    <a:pt x="1145960" y="482645"/>
-                  </a:lnTo>
-                  <a:lnTo>
-                    <a:pt x="1217582" y="558044"/>
-                  </a:lnTo>
-                  <a:lnTo>
-                    <a:pt x="1289205" y="631549"/>
-                  </a:lnTo>
-                  <a:lnTo>
-                    <a:pt x="1360827" y="703207"/>
-                  </a:lnTo>
-                  <a:lnTo>
-                    <a:pt x="1432450" y="773065"/>
-                  </a:lnTo>
-                  <a:lnTo>
-                    <a:pt x="1504073" y="841168"/>
-                  </a:lnTo>
-                  <a:lnTo>
-                    <a:pt x="1575695" y="907559"/>
-                  </a:lnTo>
-                  <a:lnTo>
-                    <a:pt x="1647318" y="972283"/>
-                  </a:lnTo>
-                  <a:lnTo>
-                    <a:pt x="1718940" y="1035380"/>
-                  </a:lnTo>
-                  <a:lnTo>
-                    <a:pt x="1790563" y="1096893"/>
-                  </a:lnTo>
-                  <a:lnTo>
-                    <a:pt x="1862185" y="1156859"/>
-                  </a:lnTo>
-                  <a:lnTo>
-                    <a:pt x="1933808" y="1215320"/>
-                  </a:lnTo>
-                  <a:lnTo>
-                    <a:pt x="2005430" y="1272311"/>
-                  </a:lnTo>
-                  <a:lnTo>
-                    <a:pt x="2077053" y="1327871"/>
-                  </a:lnTo>
-                  <a:lnTo>
-                    <a:pt x="2148675" y="1382035"/>
-                  </a:lnTo>
-                  <a:lnTo>
-                    <a:pt x="2220298" y="1434838"/>
-                  </a:lnTo>
-                  <a:lnTo>
-                    <a:pt x="2291920" y="1486314"/>
-                  </a:lnTo>
-                  <a:lnTo>
-                    <a:pt x="2363543" y="1536497"/>
-                  </a:lnTo>
-                  <a:lnTo>
-                    <a:pt x="2435165" y="1585419"/>
-                  </a:lnTo>
-                  <a:lnTo>
-                    <a:pt x="2506788" y="1633113"/>
-                  </a:lnTo>
-                  <a:lnTo>
-                    <a:pt x="2578410" y="1679608"/>
-                  </a:lnTo>
-                  <a:lnTo>
-                    <a:pt x="2650033" y="1724934"/>
-                  </a:lnTo>
-                  <a:lnTo>
-                    <a:pt x="2721655" y="1769123"/>
-                  </a:lnTo>
-                  <a:lnTo>
-                    <a:pt x="2793278" y="1812200"/>
-                  </a:lnTo>
-                  <a:lnTo>
-                    <a:pt x="2864901" y="1854196"/>
-                  </a:lnTo>
-                  <a:lnTo>
-                    <a:pt x="2936523" y="1895137"/>
-                  </a:lnTo>
-                  <a:lnTo>
-                    <a:pt x="3008146" y="1935048"/>
-                  </a:lnTo>
-                  <a:lnTo>
-                    <a:pt x="3079768" y="1973958"/>
-                  </a:lnTo>
-                  <a:lnTo>
-                    <a:pt x="3151391" y="2011889"/>
-                  </a:lnTo>
-                  <a:lnTo>
-                    <a:pt x="3223013" y="2048868"/>
-                  </a:lnTo>
-                  <a:lnTo>
-                    <a:pt x="3294636" y="2084918"/>
-                  </a:lnTo>
-                  <a:lnTo>
-                    <a:pt x="3366258" y="2120061"/>
-                  </a:lnTo>
-                  <a:lnTo>
-                    <a:pt x="3437881" y="2154322"/>
-                  </a:lnTo>
-                  <a:lnTo>
-                    <a:pt x="3509503" y="2187723"/>
-                  </a:lnTo>
-                  <a:lnTo>
-                    <a:pt x="3581126" y="2220284"/>
-                  </a:lnTo>
-                  <a:lnTo>
-                    <a:pt x="3652748" y="2252027"/>
-                  </a:lnTo>
-                  <a:lnTo>
-                    <a:pt x="3724371" y="2282972"/>
-                  </a:lnTo>
-                  <a:lnTo>
-                    <a:pt x="3795993" y="2313140"/>
-                  </a:lnTo>
-                  <a:lnTo>
-                    <a:pt x="3867616" y="2342550"/>
-                  </a:lnTo>
-                  <a:lnTo>
-                    <a:pt x="3939238" y="2371221"/>
-                  </a:lnTo>
-                  <a:lnTo>
-                    <a:pt x="4010861" y="2399172"/>
-                  </a:lnTo>
-                  <a:lnTo>
-                    <a:pt x="4082483" y="2426421"/>
-                  </a:lnTo>
-                  <a:lnTo>
-                    <a:pt x="4154106" y="2452985"/>
-                  </a:lnTo>
-                  <a:lnTo>
-                    <a:pt x="4225729" y="2478882"/>
-                  </a:lnTo>
-                  <a:lnTo>
-                    <a:pt x="4297351" y="2504128"/>
-                  </a:lnTo>
-                  <a:lnTo>
-                    <a:pt x="4368974" y="2528739"/>
-                  </a:lnTo>
-                  <a:lnTo>
-                    <a:pt x="4440596" y="2552733"/>
-                  </a:lnTo>
-                  <a:lnTo>
-                    <a:pt x="4512219" y="2576123"/>
-                  </a:lnTo>
-                  <a:lnTo>
-                    <a:pt x="4583841" y="2598926"/>
-                  </a:lnTo>
-                  <a:lnTo>
-                    <a:pt x="4655464" y="2621156"/>
-                  </a:lnTo>
-                  <a:lnTo>
-                    <a:pt x="4727086" y="2642828"/>
-                  </a:lnTo>
-                  <a:lnTo>
-                    <a:pt x="4798709" y="2658640"/>
-                  </a:lnTo>
-                  <a:lnTo>
-                    <a:pt x="4870331" y="2668014"/>
-                  </a:lnTo>
-                  <a:lnTo>
-                    <a:pt x="4941954" y="2677282"/>
-                  </a:lnTo>
-                  <a:lnTo>
-                    <a:pt x="5013576" y="2686444"/>
-                  </a:lnTo>
-                  <a:lnTo>
-                    <a:pt x="5085199" y="2695502"/>
-                  </a:lnTo>
-                  <a:lnTo>
-                    <a:pt x="5156821" y="2704458"/>
-                  </a:lnTo>
-                  <a:lnTo>
-                    <a:pt x="5228444" y="2713311"/>
-                  </a:lnTo>
-                  <a:lnTo>
-                    <a:pt x="5300066" y="2722064"/>
-                  </a:lnTo>
-                  <a:lnTo>
-                    <a:pt x="5371689" y="2730718"/>
-                  </a:lnTo>
-                  <a:lnTo>
-                    <a:pt x="5443311" y="2739273"/>
-                  </a:lnTo>
-                  <a:lnTo>
-                    <a:pt x="5514934" y="2747731"/>
-                  </a:lnTo>
-                  <a:lnTo>
-                    <a:pt x="5586557" y="2756093"/>
-                  </a:lnTo>
-                  <a:lnTo>
-                    <a:pt x="5658179" y="2764360"/>
-                  </a:lnTo>
-                  <a:lnTo>
-                    <a:pt x="5729802" y="2772533"/>
-                  </a:lnTo>
-                  <a:lnTo>
-                    <a:pt x="5801424" y="2780613"/>
-                  </a:lnTo>
-                  <a:lnTo>
-                    <a:pt x="5873047" y="2788601"/>
-                  </a:lnTo>
-                  <a:lnTo>
-                    <a:pt x="5944669" y="2796499"/>
-                  </a:lnTo>
-                  <a:lnTo>
-                    <a:pt x="6016292" y="2804307"/>
-                  </a:lnTo>
-                  <a:lnTo>
-                    <a:pt x="6087914" y="2812026"/>
-                  </a:lnTo>
-                  <a:lnTo>
-                    <a:pt x="6159537" y="2819657"/>
-                  </a:lnTo>
-                  <a:lnTo>
-                    <a:pt x="6231159" y="2827202"/>
-                  </a:lnTo>
-                  <a:lnTo>
-                    <a:pt x="6302782" y="2834661"/>
-                  </a:lnTo>
-                  <a:lnTo>
-                    <a:pt x="6374404" y="2842035"/>
-                  </a:lnTo>
-                  <a:lnTo>
-                    <a:pt x="6446027" y="2849326"/>
-                  </a:lnTo>
-                  <a:lnTo>
-                    <a:pt x="6517649" y="2856533"/>
-                  </a:lnTo>
-                  <a:lnTo>
-                    <a:pt x="6589272" y="2863659"/>
-                  </a:lnTo>
-                  <a:lnTo>
-                    <a:pt x="6660894" y="2870704"/>
-                  </a:lnTo>
-                  <a:lnTo>
-                    <a:pt x="6732517" y="2877669"/>
-                  </a:lnTo>
-                  <a:lnTo>
-                    <a:pt x="6804139" y="2884555"/>
-                  </a:lnTo>
-                  <a:lnTo>
-                    <a:pt x="6875762" y="2891362"/>
-                  </a:lnTo>
-                  <a:lnTo>
-                    <a:pt x="6947385" y="2898092"/>
-                  </a:lnTo>
-                  <a:lnTo>
-                    <a:pt x="7019007" y="2904746"/>
-                  </a:lnTo>
-                  <a:lnTo>
-                    <a:pt x="7090630" y="2911324"/>
-                  </a:lnTo>
-                  <a:lnTo>
-                    <a:pt x="7090630" y="3120596"/>
-                  </a:lnTo>
-                  <a:lnTo>
-                    <a:pt x="7019007" y="3111237"/>
-                  </a:lnTo>
-                  <a:lnTo>
-                    <a:pt x="6947385" y="3101637"/>
-                  </a:lnTo>
-                  <a:lnTo>
-                    <a:pt x="6875762" y="3091790"/>
-                  </a:lnTo>
-                  <a:lnTo>
-                    <a:pt x="6804139" y="3081689"/>
-                  </a:lnTo>
-                  <a:lnTo>
-                    <a:pt x="6732517" y="3071327"/>
-                  </a:lnTo>
-                  <a:lnTo>
-                    <a:pt x="6660894" y="3060699"/>
-                  </a:lnTo>
-                  <a:lnTo>
-                    <a:pt x="6589272" y="3049796"/>
-                  </a:lnTo>
-                  <a:lnTo>
-                    <a:pt x="6517649" y="3038613"/>
-                  </a:lnTo>
-                  <a:lnTo>
-                    <a:pt x="6446027" y="3027141"/>
-                  </a:lnTo>
-                  <a:lnTo>
-                    <a:pt x="6374404" y="3015374"/>
-                  </a:lnTo>
-                  <a:lnTo>
-                    <a:pt x="6302782" y="3003303"/>
-                  </a:lnTo>
-                  <a:lnTo>
-                    <a:pt x="6231159" y="2990921"/>
-                  </a:lnTo>
-                  <a:lnTo>
-                    <a:pt x="6159537" y="2978221"/>
-                  </a:lnTo>
-                  <a:lnTo>
-                    <a:pt x="6087914" y="2965193"/>
-                  </a:lnTo>
-                  <a:lnTo>
-                    <a:pt x="6016292" y="2951829"/>
-                  </a:lnTo>
-                  <a:lnTo>
-                    <a:pt x="5944669" y="2938121"/>
-                  </a:lnTo>
-                  <a:lnTo>
-                    <a:pt x="5873047" y="2924059"/>
-                  </a:lnTo>
-                  <a:lnTo>
-                    <a:pt x="5801424" y="2909635"/>
-                  </a:lnTo>
-                  <a:lnTo>
-                    <a:pt x="5729802" y="2894840"/>
-                  </a:lnTo>
-                  <a:lnTo>
-                    <a:pt x="5658179" y="2879663"/>
-                  </a:lnTo>
-                  <a:lnTo>
-                    <a:pt x="5586557" y="2864095"/>
-                  </a:lnTo>
-                  <a:lnTo>
-                    <a:pt x="5514934" y="2848126"/>
-                  </a:lnTo>
-                  <a:lnTo>
-                    <a:pt x="5443311" y="2831745"/>
-                  </a:lnTo>
-                  <a:lnTo>
-                    <a:pt x="5371689" y="2814942"/>
-                  </a:lnTo>
-                  <a:lnTo>
-                    <a:pt x="5300066" y="2797706"/>
-                  </a:lnTo>
-                  <a:lnTo>
-                    <a:pt x="5228444" y="2780026"/>
-                  </a:lnTo>
-                  <a:lnTo>
-                    <a:pt x="5156821" y="2761890"/>
-                  </a:lnTo>
-                  <a:lnTo>
-                    <a:pt x="5085199" y="2743287"/>
-                  </a:lnTo>
-                  <a:lnTo>
-                    <a:pt x="5013576" y="2724204"/>
-                  </a:lnTo>
-                  <a:lnTo>
-                    <a:pt x="4941954" y="2704630"/>
-                  </a:lnTo>
-                  <a:lnTo>
-                    <a:pt x="4870331" y="2684551"/>
-                  </a:lnTo>
-                  <a:lnTo>
-                    <a:pt x="4798709" y="2663955"/>
-                  </a:lnTo>
-                  <a:lnTo>
-                    <a:pt x="4727086" y="2649158"/>
-                  </a:lnTo>
-                  <a:lnTo>
-                    <a:pt x="4655464" y="2639568"/>
-                  </a:lnTo>
-                  <a:lnTo>
-                    <a:pt x="4583841" y="2629867"/>
-                  </a:lnTo>
-                  <a:lnTo>
-                    <a:pt x="4512219" y="2620054"/>
-                  </a:lnTo>
-                  <a:lnTo>
-                    <a:pt x="4440596" y="2610129"/>
-                  </a:lnTo>
-                  <a:lnTo>
-                    <a:pt x="4368974" y="2600090"/>
-                  </a:lnTo>
-                  <a:lnTo>
-                    <a:pt x="4297351" y="2589935"/>
-                  </a:lnTo>
-                  <a:lnTo>
-                    <a:pt x="4225729" y="2579664"/>
-                  </a:lnTo>
-                  <a:lnTo>
-                    <a:pt x="4154106" y="2569274"/>
-                  </a:lnTo>
-                  <a:lnTo>
-                    <a:pt x="4082483" y="2558766"/>
-                  </a:lnTo>
-                  <a:lnTo>
-                    <a:pt x="4010861" y="2548136"/>
-                  </a:lnTo>
-                  <a:lnTo>
-                    <a:pt x="3939238" y="2537384"/>
-                  </a:lnTo>
-                  <a:lnTo>
-                    <a:pt x="3867616" y="2526509"/>
-                  </a:lnTo>
-                  <a:lnTo>
-                    <a:pt x="3795993" y="2515509"/>
-                  </a:lnTo>
-                  <a:lnTo>
-                    <a:pt x="3724371" y="2504382"/>
-                  </a:lnTo>
-                  <a:lnTo>
-                    <a:pt x="3652748" y="2493128"/>
-                  </a:lnTo>
-                  <a:lnTo>
-                    <a:pt x="3581126" y="2481744"/>
-                  </a:lnTo>
-                  <a:lnTo>
-                    <a:pt x="3509503" y="2470230"/>
-                  </a:lnTo>
-                  <a:lnTo>
-                    <a:pt x="3437881" y="2458583"/>
-                  </a:lnTo>
-                  <a:lnTo>
-                    <a:pt x="3366258" y="2446802"/>
-                  </a:lnTo>
-                  <a:lnTo>
-                    <a:pt x="3294636" y="2434886"/>
-                  </a:lnTo>
-                  <a:lnTo>
-                    <a:pt x="3223013" y="2422833"/>
-                  </a:lnTo>
-                  <a:lnTo>
-                    <a:pt x="3151391" y="2410641"/>
-                  </a:lnTo>
-                  <a:lnTo>
-                    <a:pt x="3079768" y="2398309"/>
-                  </a:lnTo>
-                  <a:lnTo>
-                    <a:pt x="3008146" y="2385836"/>
-                  </a:lnTo>
-                  <a:lnTo>
-                    <a:pt x="2936523" y="2373219"/>
-                  </a:lnTo>
-                  <a:lnTo>
-                    <a:pt x="2864901" y="2360457"/>
-                  </a:lnTo>
-                  <a:lnTo>
-                    <a:pt x="2793278" y="2347549"/>
-                  </a:lnTo>
-                  <a:lnTo>
-                    <a:pt x="2721655" y="2334492"/>
-                  </a:lnTo>
-                  <a:lnTo>
-                    <a:pt x="2650033" y="2321285"/>
-                  </a:lnTo>
-                  <a:lnTo>
-                    <a:pt x="2578410" y="2307927"/>
-                  </a:lnTo>
-                  <a:lnTo>
-                    <a:pt x="2506788" y="2294415"/>
-                  </a:lnTo>
-                  <a:lnTo>
-                    <a:pt x="2435165" y="2280747"/>
-                  </a:lnTo>
-                  <a:lnTo>
-                    <a:pt x="2363543" y="2266923"/>
-                  </a:lnTo>
-                  <a:lnTo>
-                    <a:pt x="2291920" y="2252940"/>
-                  </a:lnTo>
-                  <a:lnTo>
-                    <a:pt x="2220298" y="2238796"/>
-                  </a:lnTo>
-                  <a:lnTo>
-                    <a:pt x="2148675" y="2224489"/>
-                  </a:lnTo>
-                  <a:lnTo>
-                    <a:pt x="2077053" y="2210018"/>
-                  </a:lnTo>
-                  <a:lnTo>
-                    <a:pt x="2005430" y="2195381"/>
-                  </a:lnTo>
-                  <a:lnTo>
-                    <a:pt x="1933808" y="2180576"/>
-                  </a:lnTo>
-                  <a:lnTo>
-                    <a:pt x="1862185" y="2165600"/>
-                  </a:lnTo>
-                  <a:lnTo>
-                    <a:pt x="1790563" y="2150453"/>
-                  </a:lnTo>
-                  <a:lnTo>
-                    <a:pt x="1718940" y="2135131"/>
-                  </a:lnTo>
-                  <a:lnTo>
-                    <a:pt x="1647318" y="2119633"/>
-                  </a:lnTo>
-                  <a:lnTo>
-                    <a:pt x="1575695" y="2103957"/>
-                  </a:lnTo>
-                  <a:lnTo>
-                    <a:pt x="1504073" y="2088101"/>
-                  </a:lnTo>
-                  <a:lnTo>
-                    <a:pt x="1432450" y="2072063"/>
-                  </a:lnTo>
-                  <a:lnTo>
-                    <a:pt x="1360827" y="2055841"/>
-                  </a:lnTo>
-                  <a:lnTo>
-                    <a:pt x="1289205" y="2039432"/>
-                  </a:lnTo>
-                  <a:lnTo>
-                    <a:pt x="1217582" y="2022834"/>
-                  </a:lnTo>
-                  <a:lnTo>
-                    <a:pt x="1145960" y="2006046"/>
-                  </a:lnTo>
-                  <a:lnTo>
-                    <a:pt x="1074337" y="1989065"/>
-                  </a:lnTo>
-                  <a:lnTo>
-                    <a:pt x="1002715" y="1971889"/>
-                  </a:lnTo>
-                  <a:lnTo>
-                    <a:pt x="931092" y="1954515"/>
-                  </a:lnTo>
-                  <a:lnTo>
-                    <a:pt x="859470" y="1936941"/>
-                  </a:lnTo>
-                  <a:lnTo>
-                    <a:pt x="787847" y="1919166"/>
-                  </a:lnTo>
-                  <a:lnTo>
-                    <a:pt x="716225" y="1901187"/>
-                  </a:lnTo>
-                  <a:lnTo>
-                    <a:pt x="644602" y="1883000"/>
-                  </a:lnTo>
-                  <a:lnTo>
-                    <a:pt x="572980" y="1864605"/>
-                  </a:lnTo>
-                  <a:lnTo>
-                    <a:pt x="501357" y="1845999"/>
-                  </a:lnTo>
-                  <a:lnTo>
-                    <a:pt x="429735" y="1827178"/>
-                  </a:lnTo>
-                  <a:lnTo>
-                    <a:pt x="358112" y="1808142"/>
-                  </a:lnTo>
-                  <a:lnTo>
-                    <a:pt x="286490" y="1788886"/>
-                  </a:lnTo>
-                  <a:lnTo>
-                    <a:pt x="214867" y="1769410"/>
-                  </a:lnTo>
-                  <a:lnTo>
-                    <a:pt x="143245" y="1749709"/>
-                  </a:lnTo>
-                  <a:lnTo>
-                    <a:pt x="71622" y="1729782"/>
-                  </a:lnTo>
-                  <a:lnTo>
-                    <a:pt x="0" y="1709627"/>
+                    <a:pt x="787847" y="52924"/>
+                  </a:lnTo>
+                  <a:lnTo>
+                    <a:pt x="859470" y="139516"/>
+                  </a:lnTo>
+                  <a:lnTo>
+                    <a:pt x="931092" y="223923"/>
+                  </a:lnTo>
+                  <a:lnTo>
+                    <a:pt x="1002715" y="306200"/>
+                  </a:lnTo>
+                  <a:lnTo>
+                    <a:pt x="1074337" y="386400"/>
+                  </a:lnTo>
+                  <a:lnTo>
+                    <a:pt x="1145960" y="464575"/>
+                  </a:lnTo>
+                  <a:lnTo>
+                    <a:pt x="1217582" y="540778"/>
+                  </a:lnTo>
+                  <a:lnTo>
+                    <a:pt x="1289205" y="615057"/>
+                  </a:lnTo>
+                  <a:lnTo>
+                    <a:pt x="1360827" y="687462"/>
+                  </a:lnTo>
+                  <a:lnTo>
+                    <a:pt x="1432450" y="758039"/>
+                  </a:lnTo>
+                  <a:lnTo>
+                    <a:pt x="1504073" y="826835"/>
+                  </a:lnTo>
+                  <a:lnTo>
+                    <a:pt x="1575695" y="893894"/>
+                  </a:lnTo>
+                  <a:lnTo>
+                    <a:pt x="1647318" y="959261"/>
+                  </a:lnTo>
+                  <a:lnTo>
+                    <a:pt x="1718940" y="1022978"/>
+                  </a:lnTo>
+                  <a:lnTo>
+                    <a:pt x="1790563" y="1085087"/>
+                  </a:lnTo>
+                  <a:lnTo>
+                    <a:pt x="1862185" y="1145628"/>
+                  </a:lnTo>
+                  <a:lnTo>
+                    <a:pt x="1933808" y="1204641"/>
+                  </a:lnTo>
+                  <a:lnTo>
+                    <a:pt x="2005430" y="1262165"/>
+                  </a:lnTo>
+                  <a:lnTo>
+                    <a:pt x="2077053" y="1318237"/>
+                  </a:lnTo>
+                  <a:lnTo>
+                    <a:pt x="2148675" y="1372893"/>
+                  </a:lnTo>
+                  <a:lnTo>
+                    <a:pt x="2220298" y="1426170"/>
+                  </a:lnTo>
+                  <a:lnTo>
+                    <a:pt x="2291920" y="1478103"/>
+                  </a:lnTo>
+                  <a:lnTo>
+                    <a:pt x="2363543" y="1528724"/>
+                  </a:lnTo>
+                  <a:lnTo>
+                    <a:pt x="2435165" y="1578068"/>
+                  </a:lnTo>
+                  <a:lnTo>
+                    <a:pt x="2506788" y="1626167"/>
+                  </a:lnTo>
+                  <a:lnTo>
+                    <a:pt x="2578410" y="1673051"/>
+                  </a:lnTo>
+                  <a:lnTo>
+                    <a:pt x="2650033" y="1718753"/>
+                  </a:lnTo>
+                  <a:lnTo>
+                    <a:pt x="2721655" y="1763300"/>
+                  </a:lnTo>
+                  <a:lnTo>
+                    <a:pt x="2793278" y="1806724"/>
+                  </a:lnTo>
+                  <a:lnTo>
+                    <a:pt x="2864901" y="1849051"/>
+                  </a:lnTo>
+                  <a:lnTo>
+                    <a:pt x="2936523" y="1890310"/>
+                  </a:lnTo>
+                  <a:lnTo>
+                    <a:pt x="3008146" y="1930528"/>
+                  </a:lnTo>
+                  <a:lnTo>
+                    <a:pt x="3079768" y="1969730"/>
+                  </a:lnTo>
+                  <a:lnTo>
+                    <a:pt x="3151391" y="2007944"/>
+                  </a:lnTo>
+                  <a:lnTo>
+                    <a:pt x="3223013" y="2045192"/>
+                  </a:lnTo>
+                  <a:lnTo>
+                    <a:pt x="3294636" y="2081501"/>
+                  </a:lnTo>
+                  <a:lnTo>
+                    <a:pt x="3366258" y="2116893"/>
+                  </a:lnTo>
+                  <a:lnTo>
+                    <a:pt x="3437881" y="2151392"/>
+                  </a:lnTo>
+                  <a:lnTo>
+                    <a:pt x="3509503" y="2185020"/>
+                  </a:lnTo>
+                  <a:lnTo>
+                    <a:pt x="3581126" y="2217799"/>
+                  </a:lnTo>
+                  <a:lnTo>
+                    <a:pt x="3652748" y="2249751"/>
+                  </a:lnTo>
+                  <a:lnTo>
+                    <a:pt x="3724371" y="2280897"/>
+                  </a:lnTo>
+                  <a:lnTo>
+                    <a:pt x="3795993" y="2311256"/>
+                  </a:lnTo>
+                  <a:lnTo>
+                    <a:pt x="3867616" y="2340849"/>
+                  </a:lnTo>
+                  <a:lnTo>
+                    <a:pt x="3939238" y="2369696"/>
+                  </a:lnTo>
+                  <a:lnTo>
+                    <a:pt x="4010861" y="2397814"/>
+                  </a:lnTo>
+                  <a:lnTo>
+                    <a:pt x="4082483" y="2425222"/>
+                  </a:lnTo>
+                  <a:lnTo>
+                    <a:pt x="4154106" y="2451939"/>
+                  </a:lnTo>
+                  <a:lnTo>
+                    <a:pt x="4225729" y="2477981"/>
+                  </a:lnTo>
+                  <a:lnTo>
+                    <a:pt x="4297351" y="2503366"/>
+                  </a:lnTo>
+                  <a:lnTo>
+                    <a:pt x="4368974" y="2528111"/>
+                  </a:lnTo>
+                  <a:lnTo>
+                    <a:pt x="4440596" y="2552231"/>
+                  </a:lnTo>
+                  <a:lnTo>
+                    <a:pt x="4512219" y="2575742"/>
+                  </a:lnTo>
+                  <a:lnTo>
+                    <a:pt x="4583841" y="2598659"/>
+                  </a:lnTo>
+                  <a:lnTo>
+                    <a:pt x="4655464" y="2620999"/>
+                  </a:lnTo>
+                  <a:lnTo>
+                    <a:pt x="4727086" y="2642774"/>
+                  </a:lnTo>
+                  <a:lnTo>
+                    <a:pt x="4798709" y="2658679"/>
+                  </a:lnTo>
+                  <a:lnTo>
+                    <a:pt x="4870331" y="2668136"/>
+                  </a:lnTo>
+                  <a:lnTo>
+                    <a:pt x="4941954" y="2677485"/>
+                  </a:lnTo>
+                  <a:lnTo>
+                    <a:pt x="5013576" y="2686727"/>
+                  </a:lnTo>
+                  <a:lnTo>
+                    <a:pt x="5085199" y="2695862"/>
+                  </a:lnTo>
+                  <a:lnTo>
+                    <a:pt x="5156821" y="2704893"/>
+                  </a:lnTo>
+                  <a:lnTo>
+                    <a:pt x="5228444" y="2713821"/>
+                  </a:lnTo>
+                  <a:lnTo>
+                    <a:pt x="5300066" y="2722646"/>
+                  </a:lnTo>
+                  <a:lnTo>
+                    <a:pt x="5371689" y="2731370"/>
+                  </a:lnTo>
+                  <a:lnTo>
+                    <a:pt x="5443311" y="2739994"/>
+                  </a:lnTo>
+                  <a:lnTo>
+                    <a:pt x="5514934" y="2748519"/>
+                  </a:lnTo>
+                  <a:lnTo>
+                    <a:pt x="5586557" y="2756946"/>
+                  </a:lnTo>
+                  <a:lnTo>
+                    <a:pt x="5658179" y="2765277"/>
+                  </a:lnTo>
+                  <a:lnTo>
+                    <a:pt x="5729802" y="2773513"/>
+                  </a:lnTo>
+                  <a:lnTo>
+                    <a:pt x="5801424" y="2781654"/>
+                  </a:lnTo>
+                  <a:lnTo>
+                    <a:pt x="5873047" y="2789701"/>
+                  </a:lnTo>
+                  <a:lnTo>
+                    <a:pt x="5944669" y="2797657"/>
+                  </a:lnTo>
+                  <a:lnTo>
+                    <a:pt x="6016292" y="2805521"/>
+                  </a:lnTo>
+                  <a:lnTo>
+                    <a:pt x="6087914" y="2813295"/>
+                  </a:lnTo>
+                  <a:lnTo>
+                    <a:pt x="6159537" y="2820980"/>
+                  </a:lnTo>
+                  <a:lnTo>
+                    <a:pt x="6231159" y="2828577"/>
+                  </a:lnTo>
+                  <a:lnTo>
+                    <a:pt x="6302782" y="2836086"/>
+                  </a:lnTo>
+                  <a:lnTo>
+                    <a:pt x="6374404" y="2843510"/>
+                  </a:lnTo>
+                  <a:lnTo>
+                    <a:pt x="6446027" y="2850849"/>
+                  </a:lnTo>
+                  <a:lnTo>
+                    <a:pt x="6517649" y="2858103"/>
+                  </a:lnTo>
+                  <a:lnTo>
+                    <a:pt x="6589272" y="2865274"/>
+                  </a:lnTo>
+                  <a:lnTo>
+                    <a:pt x="6660894" y="2872363"/>
+                  </a:lnTo>
+                  <a:lnTo>
+                    <a:pt x="6732517" y="2879371"/>
+                  </a:lnTo>
+                  <a:lnTo>
+                    <a:pt x="6804139" y="2886299"/>
+                  </a:lnTo>
+                  <a:lnTo>
+                    <a:pt x="6875762" y="2893147"/>
+                  </a:lnTo>
+                  <a:lnTo>
+                    <a:pt x="6947385" y="2899917"/>
+                  </a:lnTo>
+                  <a:lnTo>
+                    <a:pt x="7019007" y="2906609"/>
+                  </a:lnTo>
+                  <a:lnTo>
+                    <a:pt x="7090630" y="2913224"/>
+                  </a:lnTo>
+                  <a:lnTo>
+                    <a:pt x="7090630" y="3121994"/>
+                  </a:lnTo>
+                  <a:lnTo>
+                    <a:pt x="7019007" y="3112627"/>
+                  </a:lnTo>
+                  <a:lnTo>
+                    <a:pt x="6947385" y="3103017"/>
+                  </a:lnTo>
+                  <a:lnTo>
+                    <a:pt x="6875762" y="3093159"/>
+                  </a:lnTo>
+                  <a:lnTo>
+                    <a:pt x="6804139" y="3083046"/>
+                  </a:lnTo>
+                  <a:lnTo>
+                    <a:pt x="6732517" y="3072670"/>
+                  </a:lnTo>
+                  <a:lnTo>
+                    <a:pt x="6660894" y="3062026"/>
+                  </a:lnTo>
+                  <a:lnTo>
+                    <a:pt x="6589272" y="3051106"/>
+                  </a:lnTo>
+                  <a:lnTo>
+                    <a:pt x="6517649" y="3039904"/>
+                  </a:lnTo>
+                  <a:lnTo>
+                    <a:pt x="6446027" y="3028412"/>
+                  </a:lnTo>
+                  <a:lnTo>
+                    <a:pt x="6374404" y="3016622"/>
+                  </a:lnTo>
+                  <a:lnTo>
+                    <a:pt x="6302782" y="3004526"/>
+                  </a:lnTo>
+                  <a:lnTo>
+                    <a:pt x="6231159" y="2992118"/>
+                  </a:lnTo>
+                  <a:lnTo>
+                    <a:pt x="6159537" y="2979388"/>
+                  </a:lnTo>
+                  <a:lnTo>
+                    <a:pt x="6087914" y="2966329"/>
+                  </a:lnTo>
+                  <a:lnTo>
+                    <a:pt x="6016292" y="2952931"/>
+                  </a:lnTo>
+                  <a:lnTo>
+                    <a:pt x="5944669" y="2939186"/>
+                  </a:lnTo>
+                  <a:lnTo>
+                    <a:pt x="5873047" y="2925086"/>
+                  </a:lnTo>
+                  <a:lnTo>
+                    <a:pt x="5801424" y="2910621"/>
+                  </a:lnTo>
+                  <a:lnTo>
+                    <a:pt x="5729802" y="2895781"/>
+                  </a:lnTo>
+                  <a:lnTo>
+                    <a:pt x="5658179" y="2880556"/>
+                  </a:lnTo>
+                  <a:lnTo>
+                    <a:pt x="5586557" y="2864938"/>
+                  </a:lnTo>
+                  <a:lnTo>
+                    <a:pt x="5514934" y="2848915"/>
+                  </a:lnTo>
+                  <a:lnTo>
+                    <a:pt x="5443311" y="2832477"/>
+                  </a:lnTo>
+                  <a:lnTo>
+                    <a:pt x="5371689" y="2815614"/>
+                  </a:lnTo>
+                  <a:lnTo>
+                    <a:pt x="5300066" y="2798314"/>
+                  </a:lnTo>
+                  <a:lnTo>
+                    <a:pt x="5228444" y="2780566"/>
+                  </a:lnTo>
+                  <a:lnTo>
+                    <a:pt x="5156821" y="2762358"/>
+                  </a:lnTo>
+                  <a:lnTo>
+                    <a:pt x="5085199" y="2743679"/>
+                  </a:lnTo>
+                  <a:lnTo>
+                    <a:pt x="5013576" y="2724517"/>
+                  </a:lnTo>
+                  <a:lnTo>
+                    <a:pt x="4941954" y="2704858"/>
+                  </a:lnTo>
+                  <a:lnTo>
+                    <a:pt x="4870331" y="2684690"/>
+                  </a:lnTo>
+                  <a:lnTo>
+                    <a:pt x="4798709" y="2664000"/>
+                  </a:lnTo>
+                  <a:lnTo>
+                    <a:pt x="4727086" y="2649112"/>
+                  </a:lnTo>
+                  <a:lnTo>
+                    <a:pt x="4655464" y="2639435"/>
+                  </a:lnTo>
+                  <a:lnTo>
+                    <a:pt x="4583841" y="2629645"/>
+                  </a:lnTo>
+                  <a:lnTo>
+                    <a:pt x="4512219" y="2619741"/>
+                  </a:lnTo>
+                  <a:lnTo>
+                    <a:pt x="4440596" y="2609723"/>
+                  </a:lnTo>
+                  <a:lnTo>
+                    <a:pt x="4368974" y="2599588"/>
+                  </a:lnTo>
+                  <a:lnTo>
+                    <a:pt x="4297351" y="2589336"/>
+                  </a:lnTo>
+                  <a:lnTo>
+                    <a:pt x="4225729" y="2578965"/>
+                  </a:lnTo>
+                  <a:lnTo>
+                    <a:pt x="4154106" y="2568474"/>
+                  </a:lnTo>
+                  <a:lnTo>
+                    <a:pt x="4082483" y="2557861"/>
+                  </a:lnTo>
+                  <a:lnTo>
+                    <a:pt x="4010861" y="2547126"/>
+                  </a:lnTo>
+                  <a:lnTo>
+                    <a:pt x="3939238" y="2536265"/>
+                  </a:lnTo>
+                  <a:lnTo>
+                    <a:pt x="3867616" y="2525279"/>
+                  </a:lnTo>
+                  <a:lnTo>
+                    <a:pt x="3795993" y="2514165"/>
+                  </a:lnTo>
+                  <a:lnTo>
+                    <a:pt x="3724371" y="2502923"/>
+                  </a:lnTo>
+                  <a:lnTo>
+                    <a:pt x="3652748" y="2491550"/>
+                  </a:lnTo>
+                  <a:lnTo>
+                    <a:pt x="3581126" y="2480045"/>
+                  </a:lnTo>
+                  <a:lnTo>
+                    <a:pt x="3509503" y="2468407"/>
+                  </a:lnTo>
+                  <a:lnTo>
+                    <a:pt x="3437881" y="2456634"/>
+                  </a:lnTo>
+                  <a:lnTo>
+                    <a:pt x="3366258" y="2444724"/>
+                  </a:lnTo>
+                  <a:lnTo>
+                    <a:pt x="3294636" y="2432677"/>
+                  </a:lnTo>
+                  <a:lnTo>
+                    <a:pt x="3223013" y="2420489"/>
+                  </a:lnTo>
+                  <a:lnTo>
+                    <a:pt x="3151391" y="2408161"/>
+                  </a:lnTo>
+                  <a:lnTo>
+                    <a:pt x="3079768" y="2395689"/>
+                  </a:lnTo>
+                  <a:lnTo>
+                    <a:pt x="3008146" y="2383073"/>
+                  </a:lnTo>
+                  <a:lnTo>
+                    <a:pt x="2936523" y="2370310"/>
+                  </a:lnTo>
+                  <a:lnTo>
+                    <a:pt x="2864901" y="2357399"/>
+                  </a:lnTo>
+                  <a:lnTo>
+                    <a:pt x="2793278" y="2344339"/>
+                  </a:lnTo>
+                  <a:lnTo>
+                    <a:pt x="2721655" y="2331128"/>
+                  </a:lnTo>
+                  <a:lnTo>
+                    <a:pt x="2650033" y="2317763"/>
+                  </a:lnTo>
+                  <a:lnTo>
+                    <a:pt x="2578410" y="2304243"/>
+                  </a:lnTo>
+                  <a:lnTo>
+                    <a:pt x="2506788" y="2290566"/>
+                  </a:lnTo>
+                  <a:lnTo>
+                    <a:pt x="2435165" y="2276731"/>
+                  </a:lnTo>
+                  <a:lnTo>
+                    <a:pt x="2363543" y="2262735"/>
+                  </a:lnTo>
+                  <a:lnTo>
+                    <a:pt x="2291920" y="2248578"/>
+                  </a:lnTo>
+                  <a:lnTo>
+                    <a:pt x="2220298" y="2234255"/>
+                  </a:lnTo>
+                  <a:lnTo>
+                    <a:pt x="2148675" y="2219767"/>
+                  </a:lnTo>
+                  <a:lnTo>
+                    <a:pt x="2077053" y="2205111"/>
+                  </a:lnTo>
+                  <a:lnTo>
+                    <a:pt x="2005430" y="2190285"/>
+                  </a:lnTo>
+                  <a:lnTo>
+                    <a:pt x="1933808" y="2175287"/>
+                  </a:lnTo>
+                  <a:lnTo>
+                    <a:pt x="1862185" y="2160115"/>
+                  </a:lnTo>
+                  <a:lnTo>
+                    <a:pt x="1790563" y="2144767"/>
+                  </a:lnTo>
+                  <a:lnTo>
+                    <a:pt x="1718940" y="2129242"/>
+                  </a:lnTo>
+                  <a:lnTo>
+                    <a:pt x="1647318" y="2113536"/>
+                  </a:lnTo>
+                  <a:lnTo>
+                    <a:pt x="1575695" y="2097648"/>
+                  </a:lnTo>
+                  <a:lnTo>
+                    <a:pt x="1504073" y="2081576"/>
+                  </a:lnTo>
+                  <a:lnTo>
+                    <a:pt x="1432450" y="2065317"/>
+                  </a:lnTo>
+                  <a:lnTo>
+                    <a:pt x="1360827" y="2048870"/>
+                  </a:lnTo>
+                  <a:lnTo>
+                    <a:pt x="1289205" y="2032233"/>
+                  </a:lnTo>
+                  <a:lnTo>
+                    <a:pt x="1217582" y="2015402"/>
+                  </a:lnTo>
+                  <a:lnTo>
+                    <a:pt x="1145960" y="1998376"/>
+                  </a:lnTo>
+                  <a:lnTo>
+                    <a:pt x="1074337" y="1981153"/>
+                  </a:lnTo>
+                  <a:lnTo>
+                    <a:pt x="1002715" y="1963730"/>
+                  </a:lnTo>
+                  <a:lnTo>
+                    <a:pt x="931092" y="1946105"/>
+                  </a:lnTo>
+                  <a:lnTo>
+                    <a:pt x="859470" y="1928276"/>
+                  </a:lnTo>
+                  <a:lnTo>
+                    <a:pt x="787847" y="1910240"/>
+                  </a:lnTo>
+                  <a:lnTo>
+                    <a:pt x="716225" y="1891995"/>
+                  </a:lnTo>
+                  <a:lnTo>
+                    <a:pt x="644602" y="1873538"/>
+                  </a:lnTo>
+                  <a:lnTo>
+                    <a:pt x="572980" y="1854867"/>
+                  </a:lnTo>
+                  <a:lnTo>
+                    <a:pt x="501357" y="1835980"/>
+                  </a:lnTo>
+                  <a:lnTo>
+                    <a:pt x="429735" y="1816874"/>
+                  </a:lnTo>
+                  <a:lnTo>
+                    <a:pt x="358112" y="1797546"/>
+                  </a:lnTo>
+                  <a:lnTo>
+                    <a:pt x="286490" y="1777994"/>
+                  </a:lnTo>
+                  <a:lnTo>
+                    <a:pt x="214867" y="1758216"/>
+                  </a:lnTo>
+                  <a:lnTo>
+                    <a:pt x="143245" y="1738208"/>
+                  </a:lnTo>
+                  <a:lnTo>
+                    <a:pt x="71622" y="1717968"/>
+                  </a:lnTo>
+                  <a:lnTo>
+                    <a:pt x="0" y="1697493"/>
                   </a:lnTo>
                   <a:close/>
                 </a:path>
@@ -3646,282 +3646,282 @@
           </p:nvSpPr>
           <p:spPr>
             <a:xfrm>
-              <a:off x="1898347" y="2073503"/>
-              <a:ext cx="6364332" cy="2911324"/>
+              <a:off x="1917227" y="2073503"/>
+              <a:ext cx="6345452" cy="2913224"/>
             </a:xfrm>
             <a:custGeom>
               <a:avLst/>
               <a:pathLst>
-                <a:path w="6364332" h="2911324">
+                <a:path w="6345452" h="2913224">
                   <a:moveTo>
                     <a:pt x="0" y="0"/>
                   </a:moveTo>
                   <a:lnTo>
-                    <a:pt x="61549" y="75482"/>
-                  </a:lnTo>
-                  <a:lnTo>
-                    <a:pt x="133172" y="161110"/>
-                  </a:lnTo>
-                  <a:lnTo>
-                    <a:pt x="204794" y="244588"/>
-                  </a:lnTo>
-                  <a:lnTo>
-                    <a:pt x="276417" y="325968"/>
-                  </a:lnTo>
-                  <a:lnTo>
-                    <a:pt x="348039" y="405303"/>
-                  </a:lnTo>
-                  <a:lnTo>
-                    <a:pt x="419662" y="482645"/>
-                  </a:lnTo>
-                  <a:lnTo>
-                    <a:pt x="491284" y="558044"/>
-                  </a:lnTo>
-                  <a:lnTo>
-                    <a:pt x="562907" y="631549"/>
-                  </a:lnTo>
-                  <a:lnTo>
-                    <a:pt x="634529" y="703207"/>
-                  </a:lnTo>
-                  <a:lnTo>
-                    <a:pt x="706152" y="773065"/>
-                  </a:lnTo>
-                  <a:lnTo>
-                    <a:pt x="777774" y="841168"/>
-                  </a:lnTo>
-                  <a:lnTo>
-                    <a:pt x="849397" y="907559"/>
-                  </a:lnTo>
-                  <a:lnTo>
-                    <a:pt x="921020" y="972283"/>
-                  </a:lnTo>
-                  <a:lnTo>
-                    <a:pt x="992642" y="1035380"/>
-                  </a:lnTo>
-                  <a:lnTo>
-                    <a:pt x="1064265" y="1096893"/>
-                  </a:lnTo>
-                  <a:lnTo>
-                    <a:pt x="1135887" y="1156859"/>
-                  </a:lnTo>
-                  <a:lnTo>
-                    <a:pt x="1207510" y="1215320"/>
-                  </a:lnTo>
-                  <a:lnTo>
-                    <a:pt x="1279132" y="1272311"/>
-                  </a:lnTo>
-                  <a:lnTo>
-                    <a:pt x="1350755" y="1327871"/>
-                  </a:lnTo>
-                  <a:lnTo>
-                    <a:pt x="1422377" y="1382035"/>
-                  </a:lnTo>
-                  <a:lnTo>
-                    <a:pt x="1494000" y="1434838"/>
-                  </a:lnTo>
-                  <a:lnTo>
-                    <a:pt x="1565622" y="1486314"/>
-                  </a:lnTo>
-                  <a:lnTo>
-                    <a:pt x="1637245" y="1536497"/>
-                  </a:lnTo>
-                  <a:lnTo>
-                    <a:pt x="1708867" y="1585419"/>
-                  </a:lnTo>
-                  <a:lnTo>
-                    <a:pt x="1780490" y="1633113"/>
-                  </a:lnTo>
-                  <a:lnTo>
-                    <a:pt x="1852112" y="1679608"/>
-                  </a:lnTo>
-                  <a:lnTo>
-                    <a:pt x="1923735" y="1724934"/>
-                  </a:lnTo>
-                  <a:lnTo>
-                    <a:pt x="1995357" y="1769123"/>
-                  </a:lnTo>
-                  <a:lnTo>
-                    <a:pt x="2066980" y="1812200"/>
-                  </a:lnTo>
-                  <a:lnTo>
-                    <a:pt x="2138602" y="1854196"/>
-                  </a:lnTo>
-                  <a:lnTo>
-                    <a:pt x="2210225" y="1895137"/>
-                  </a:lnTo>
-                  <a:lnTo>
-                    <a:pt x="2281848" y="1935048"/>
-                  </a:lnTo>
-                  <a:lnTo>
-                    <a:pt x="2353470" y="1973958"/>
-                  </a:lnTo>
-                  <a:lnTo>
-                    <a:pt x="2425093" y="2011889"/>
-                  </a:lnTo>
-                  <a:lnTo>
-                    <a:pt x="2496715" y="2048868"/>
-                  </a:lnTo>
-                  <a:lnTo>
-                    <a:pt x="2568338" y="2084918"/>
-                  </a:lnTo>
-                  <a:lnTo>
-                    <a:pt x="2639960" y="2120061"/>
-                  </a:lnTo>
-                  <a:lnTo>
-                    <a:pt x="2711583" y="2154322"/>
-                  </a:lnTo>
-                  <a:lnTo>
-                    <a:pt x="2783205" y="2187723"/>
-                  </a:lnTo>
-                  <a:lnTo>
-                    <a:pt x="2854828" y="2220284"/>
-                  </a:lnTo>
-                  <a:lnTo>
-                    <a:pt x="2926450" y="2252027"/>
-                  </a:lnTo>
-                  <a:lnTo>
-                    <a:pt x="2998073" y="2282972"/>
-                  </a:lnTo>
-                  <a:lnTo>
-                    <a:pt x="3069695" y="2313140"/>
-                  </a:lnTo>
-                  <a:lnTo>
-                    <a:pt x="3141318" y="2342550"/>
-                  </a:lnTo>
-                  <a:lnTo>
-                    <a:pt x="3212940" y="2371221"/>
-                  </a:lnTo>
-                  <a:lnTo>
-                    <a:pt x="3284563" y="2399172"/>
-                  </a:lnTo>
-                  <a:lnTo>
-                    <a:pt x="3356185" y="2426421"/>
-                  </a:lnTo>
-                  <a:lnTo>
-                    <a:pt x="3427808" y="2452985"/>
-                  </a:lnTo>
-                  <a:lnTo>
-                    <a:pt x="3499430" y="2478882"/>
-                  </a:lnTo>
-                  <a:lnTo>
-                    <a:pt x="3571053" y="2504128"/>
-                  </a:lnTo>
-                  <a:lnTo>
-                    <a:pt x="3642676" y="2528739"/>
-                  </a:lnTo>
-                  <a:lnTo>
-                    <a:pt x="3714298" y="2552733"/>
-                  </a:lnTo>
-                  <a:lnTo>
-                    <a:pt x="3785921" y="2576123"/>
-                  </a:lnTo>
-                  <a:lnTo>
-                    <a:pt x="3857543" y="2598926"/>
-                  </a:lnTo>
-                  <a:lnTo>
-                    <a:pt x="3929166" y="2621156"/>
-                  </a:lnTo>
-                  <a:lnTo>
-                    <a:pt x="4000788" y="2642828"/>
-                  </a:lnTo>
-                  <a:lnTo>
-                    <a:pt x="4072411" y="2658640"/>
-                  </a:lnTo>
-                  <a:lnTo>
-                    <a:pt x="4144033" y="2668014"/>
-                  </a:lnTo>
-                  <a:lnTo>
-                    <a:pt x="4215656" y="2677282"/>
-                  </a:lnTo>
-                  <a:lnTo>
-                    <a:pt x="4287278" y="2686444"/>
-                  </a:lnTo>
-                  <a:lnTo>
-                    <a:pt x="4358901" y="2695502"/>
-                  </a:lnTo>
-                  <a:lnTo>
-                    <a:pt x="4430523" y="2704458"/>
-                  </a:lnTo>
-                  <a:lnTo>
-                    <a:pt x="4502146" y="2713311"/>
-                  </a:lnTo>
-                  <a:lnTo>
-                    <a:pt x="4573768" y="2722064"/>
-                  </a:lnTo>
-                  <a:lnTo>
-                    <a:pt x="4645391" y="2730718"/>
-                  </a:lnTo>
-                  <a:lnTo>
-                    <a:pt x="4717013" y="2739273"/>
-                  </a:lnTo>
-                  <a:lnTo>
-                    <a:pt x="4788636" y="2747731"/>
-                  </a:lnTo>
-                  <a:lnTo>
-                    <a:pt x="4860258" y="2756093"/>
-                  </a:lnTo>
-                  <a:lnTo>
-                    <a:pt x="4931881" y="2764360"/>
-                  </a:lnTo>
-                  <a:lnTo>
-                    <a:pt x="5003504" y="2772533"/>
-                  </a:lnTo>
-                  <a:lnTo>
-                    <a:pt x="5075126" y="2780613"/>
-                  </a:lnTo>
-                  <a:lnTo>
-                    <a:pt x="5146749" y="2788601"/>
-                  </a:lnTo>
-                  <a:lnTo>
-                    <a:pt x="5218371" y="2796499"/>
-                  </a:lnTo>
-                  <a:lnTo>
-                    <a:pt x="5289994" y="2804307"/>
-                  </a:lnTo>
-                  <a:lnTo>
-                    <a:pt x="5361616" y="2812026"/>
-                  </a:lnTo>
-                  <a:lnTo>
-                    <a:pt x="5433239" y="2819657"/>
-                  </a:lnTo>
-                  <a:lnTo>
-                    <a:pt x="5504861" y="2827202"/>
-                  </a:lnTo>
-                  <a:lnTo>
-                    <a:pt x="5576484" y="2834661"/>
-                  </a:lnTo>
-                  <a:lnTo>
-                    <a:pt x="5648106" y="2842035"/>
-                  </a:lnTo>
-                  <a:lnTo>
-                    <a:pt x="5719729" y="2849326"/>
-                  </a:lnTo>
-                  <a:lnTo>
-                    <a:pt x="5791351" y="2856533"/>
-                  </a:lnTo>
-                  <a:lnTo>
-                    <a:pt x="5862974" y="2863659"/>
-                  </a:lnTo>
-                  <a:lnTo>
-                    <a:pt x="5934596" y="2870704"/>
-                  </a:lnTo>
-                  <a:lnTo>
-                    <a:pt x="6006219" y="2877669"/>
-                  </a:lnTo>
-                  <a:lnTo>
-                    <a:pt x="6077841" y="2884555"/>
-                  </a:lnTo>
-                  <a:lnTo>
-                    <a:pt x="6149464" y="2891362"/>
-                  </a:lnTo>
-                  <a:lnTo>
-                    <a:pt x="6221086" y="2898092"/>
-                  </a:lnTo>
-                  <a:lnTo>
-                    <a:pt x="6292709" y="2904746"/>
-                  </a:lnTo>
-                  <a:lnTo>
-                    <a:pt x="6364332" y="2911324"/>
+                    <a:pt x="42669" y="52924"/>
+                  </a:lnTo>
+                  <a:lnTo>
+                    <a:pt x="114292" y="139516"/>
+                  </a:lnTo>
+                  <a:lnTo>
+                    <a:pt x="185914" y="223923"/>
+                  </a:lnTo>
+                  <a:lnTo>
+                    <a:pt x="257537" y="306200"/>
+                  </a:lnTo>
+                  <a:lnTo>
+                    <a:pt x="329159" y="386400"/>
+                  </a:lnTo>
+                  <a:lnTo>
+                    <a:pt x="400782" y="464575"/>
+                  </a:lnTo>
+                  <a:lnTo>
+                    <a:pt x="472404" y="540778"/>
+                  </a:lnTo>
+                  <a:lnTo>
+                    <a:pt x="544027" y="615057"/>
+                  </a:lnTo>
+                  <a:lnTo>
+                    <a:pt x="615649" y="687462"/>
+                  </a:lnTo>
+                  <a:lnTo>
+                    <a:pt x="687272" y="758039"/>
+                  </a:lnTo>
+                  <a:lnTo>
+                    <a:pt x="758894" y="826835"/>
+                  </a:lnTo>
+                  <a:lnTo>
+                    <a:pt x="830517" y="893894"/>
+                  </a:lnTo>
+                  <a:lnTo>
+                    <a:pt x="902140" y="959261"/>
+                  </a:lnTo>
+                  <a:lnTo>
+                    <a:pt x="973762" y="1022978"/>
+                  </a:lnTo>
+                  <a:lnTo>
+                    <a:pt x="1045385" y="1085087"/>
+                  </a:lnTo>
+                  <a:lnTo>
+                    <a:pt x="1117007" y="1145628"/>
+                  </a:lnTo>
+                  <a:lnTo>
+                    <a:pt x="1188630" y="1204641"/>
+                  </a:lnTo>
+                  <a:lnTo>
+                    <a:pt x="1260252" y="1262165"/>
+                  </a:lnTo>
+                  <a:lnTo>
+                    <a:pt x="1331875" y="1318237"/>
+                  </a:lnTo>
+                  <a:lnTo>
+                    <a:pt x="1403497" y="1372893"/>
+                  </a:lnTo>
+                  <a:lnTo>
+                    <a:pt x="1475120" y="1426170"/>
+                  </a:lnTo>
+                  <a:lnTo>
+                    <a:pt x="1546742" y="1478103"/>
+                  </a:lnTo>
+                  <a:lnTo>
+                    <a:pt x="1618365" y="1528724"/>
+                  </a:lnTo>
+                  <a:lnTo>
+                    <a:pt x="1689987" y="1578068"/>
+                  </a:lnTo>
+                  <a:lnTo>
+                    <a:pt x="1761610" y="1626167"/>
+                  </a:lnTo>
+                  <a:lnTo>
+                    <a:pt x="1833232" y="1673051"/>
+                  </a:lnTo>
+                  <a:lnTo>
+                    <a:pt x="1904855" y="1718753"/>
+                  </a:lnTo>
+                  <a:lnTo>
+                    <a:pt x="1976477" y="1763300"/>
+                  </a:lnTo>
+                  <a:lnTo>
+                    <a:pt x="2048100" y="1806724"/>
+                  </a:lnTo>
+                  <a:lnTo>
+                    <a:pt x="2119722" y="1849051"/>
+                  </a:lnTo>
+                  <a:lnTo>
+                    <a:pt x="2191345" y="1890310"/>
+                  </a:lnTo>
+                  <a:lnTo>
+                    <a:pt x="2262968" y="1930528"/>
+                  </a:lnTo>
+                  <a:lnTo>
+                    <a:pt x="2334590" y="1969730"/>
+                  </a:lnTo>
+                  <a:lnTo>
+                    <a:pt x="2406213" y="2007944"/>
+                  </a:lnTo>
+                  <a:lnTo>
+                    <a:pt x="2477835" y="2045192"/>
+                  </a:lnTo>
+                  <a:lnTo>
+                    <a:pt x="2549458" y="2081501"/>
+                  </a:lnTo>
+                  <a:lnTo>
+                    <a:pt x="2621080" y="2116893"/>
+                  </a:lnTo>
+                  <a:lnTo>
+                    <a:pt x="2692703" y="2151392"/>
+                  </a:lnTo>
+                  <a:lnTo>
+                    <a:pt x="2764325" y="2185020"/>
+                  </a:lnTo>
+                  <a:lnTo>
+                    <a:pt x="2835948" y="2217799"/>
+                  </a:lnTo>
+                  <a:lnTo>
+                    <a:pt x="2907570" y="2249751"/>
+                  </a:lnTo>
+                  <a:lnTo>
+                    <a:pt x="2979193" y="2280897"/>
+                  </a:lnTo>
+                  <a:lnTo>
+                    <a:pt x="3050815" y="2311256"/>
+                  </a:lnTo>
+                  <a:lnTo>
+                    <a:pt x="3122438" y="2340849"/>
+                  </a:lnTo>
+                  <a:lnTo>
+                    <a:pt x="3194060" y="2369696"/>
+                  </a:lnTo>
+                  <a:lnTo>
+                    <a:pt x="3265683" y="2397814"/>
+                  </a:lnTo>
+                  <a:lnTo>
+                    <a:pt x="3337305" y="2425222"/>
+                  </a:lnTo>
+                  <a:lnTo>
+                    <a:pt x="3408928" y="2451939"/>
+                  </a:lnTo>
+                  <a:lnTo>
+                    <a:pt x="3480550" y="2477981"/>
+                  </a:lnTo>
+                  <a:lnTo>
+                    <a:pt x="3552173" y="2503366"/>
+                  </a:lnTo>
+                  <a:lnTo>
+                    <a:pt x="3623796" y="2528111"/>
+                  </a:lnTo>
+                  <a:lnTo>
+                    <a:pt x="3695418" y="2552231"/>
+                  </a:lnTo>
+                  <a:lnTo>
+                    <a:pt x="3767041" y="2575742"/>
+                  </a:lnTo>
+                  <a:lnTo>
+                    <a:pt x="3838663" y="2598659"/>
+                  </a:lnTo>
+                  <a:lnTo>
+                    <a:pt x="3910286" y="2620999"/>
+                  </a:lnTo>
+                  <a:lnTo>
+                    <a:pt x="3981908" y="2642774"/>
+                  </a:lnTo>
+                  <a:lnTo>
+                    <a:pt x="4053531" y="2658679"/>
+                  </a:lnTo>
+                  <a:lnTo>
+                    <a:pt x="4125153" y="2668136"/>
+                  </a:lnTo>
+                  <a:lnTo>
+                    <a:pt x="4196776" y="2677485"/>
+                  </a:lnTo>
+                  <a:lnTo>
+                    <a:pt x="4268398" y="2686727"/>
+                  </a:lnTo>
+                  <a:lnTo>
+                    <a:pt x="4340021" y="2695862"/>
+                  </a:lnTo>
+                  <a:lnTo>
+                    <a:pt x="4411643" y="2704893"/>
+                  </a:lnTo>
+                  <a:lnTo>
+                    <a:pt x="4483266" y="2713821"/>
+                  </a:lnTo>
+                  <a:lnTo>
+                    <a:pt x="4554888" y="2722646"/>
+                  </a:lnTo>
+                  <a:lnTo>
+                    <a:pt x="4626511" y="2731370"/>
+                  </a:lnTo>
+                  <a:lnTo>
+                    <a:pt x="4698133" y="2739994"/>
+                  </a:lnTo>
+                  <a:lnTo>
+                    <a:pt x="4769756" y="2748519"/>
+                  </a:lnTo>
+                  <a:lnTo>
+                    <a:pt x="4841378" y="2756946"/>
+                  </a:lnTo>
+                  <a:lnTo>
+                    <a:pt x="4913001" y="2765277"/>
+                  </a:lnTo>
+                  <a:lnTo>
+                    <a:pt x="4984624" y="2773513"/>
+                  </a:lnTo>
+                  <a:lnTo>
+                    <a:pt x="5056246" y="2781654"/>
+                  </a:lnTo>
+                  <a:lnTo>
+                    <a:pt x="5127869" y="2789701"/>
+                  </a:lnTo>
+                  <a:lnTo>
+                    <a:pt x="5199491" y="2797657"/>
+                  </a:lnTo>
+                  <a:lnTo>
+                    <a:pt x="5271114" y="2805521"/>
+                  </a:lnTo>
+                  <a:lnTo>
+                    <a:pt x="5342736" y="2813295"/>
+                  </a:lnTo>
+                  <a:lnTo>
+                    <a:pt x="5414359" y="2820980"/>
+                  </a:lnTo>
+                  <a:lnTo>
+                    <a:pt x="5485981" y="2828577"/>
+                  </a:lnTo>
+                  <a:lnTo>
+                    <a:pt x="5557604" y="2836086"/>
+                  </a:lnTo>
+                  <a:lnTo>
+                    <a:pt x="5629226" y="2843510"/>
+                  </a:lnTo>
+                  <a:lnTo>
+                    <a:pt x="5700849" y="2850849"/>
+                  </a:lnTo>
+                  <a:lnTo>
+                    <a:pt x="5772471" y="2858103"/>
+                  </a:lnTo>
+                  <a:lnTo>
+                    <a:pt x="5844094" y="2865274"/>
+                  </a:lnTo>
+                  <a:lnTo>
+                    <a:pt x="5915716" y="2872363"/>
+                  </a:lnTo>
+                  <a:lnTo>
+                    <a:pt x="5987339" y="2879371"/>
+                  </a:lnTo>
+                  <a:lnTo>
+                    <a:pt x="6058961" y="2886299"/>
+                  </a:lnTo>
+                  <a:lnTo>
+                    <a:pt x="6130584" y="2893147"/>
+                  </a:lnTo>
+                  <a:lnTo>
+                    <a:pt x="6202206" y="2899917"/>
+                  </a:lnTo>
+                  <a:lnTo>
+                    <a:pt x="6273829" y="2906609"/>
+                  </a:lnTo>
+                  <a:lnTo>
+                    <a:pt x="6345452" y="2913224"/>
                   </a:lnTo>
                 </a:path>
               </a:pathLst>
@@ -3941,309 +3941,309 @@
           </p:nvSpPr>
           <p:spPr>
             <a:xfrm>
-              <a:off x="1172049" y="3783130"/>
-              <a:ext cx="7090630" cy="1410969"/>
+              <a:off x="1172049" y="3770996"/>
+              <a:ext cx="7090630" cy="1424500"/>
             </a:xfrm>
             <a:custGeom>
               <a:avLst/>
               <a:pathLst>
-                <a:path w="7090630" h="1410969">
+                <a:path w="7090630" h="1424500">
                   <a:moveTo>
-                    <a:pt x="7090630" y="1410969"/>
+                    <a:pt x="7090630" y="1424500"/>
                   </a:moveTo>
                   <a:lnTo>
-                    <a:pt x="7019007" y="1401610"/>
-                  </a:lnTo>
-                  <a:lnTo>
-                    <a:pt x="6947385" y="1392010"/>
-                  </a:lnTo>
-                  <a:lnTo>
-                    <a:pt x="6875762" y="1382163"/>
-                  </a:lnTo>
-                  <a:lnTo>
-                    <a:pt x="6804139" y="1372062"/>
-                  </a:lnTo>
-                  <a:lnTo>
-                    <a:pt x="6732517" y="1361700"/>
-                  </a:lnTo>
-                  <a:lnTo>
-                    <a:pt x="6660894" y="1351072"/>
-                  </a:lnTo>
-                  <a:lnTo>
-                    <a:pt x="6589272" y="1340169"/>
-                  </a:lnTo>
-                  <a:lnTo>
-                    <a:pt x="6517649" y="1328986"/>
-                  </a:lnTo>
-                  <a:lnTo>
-                    <a:pt x="6446027" y="1317514"/>
-                  </a:lnTo>
-                  <a:lnTo>
-                    <a:pt x="6374404" y="1305747"/>
-                  </a:lnTo>
-                  <a:lnTo>
-                    <a:pt x="6302782" y="1293676"/>
-                  </a:lnTo>
-                  <a:lnTo>
-                    <a:pt x="6231159" y="1281294"/>
-                  </a:lnTo>
-                  <a:lnTo>
-                    <a:pt x="6159537" y="1268594"/>
-                  </a:lnTo>
-                  <a:lnTo>
-                    <a:pt x="6087914" y="1255566"/>
-                  </a:lnTo>
-                  <a:lnTo>
-                    <a:pt x="6016292" y="1242202"/>
-                  </a:lnTo>
-                  <a:lnTo>
-                    <a:pt x="5944669" y="1228494"/>
-                  </a:lnTo>
-                  <a:lnTo>
-                    <a:pt x="5873047" y="1214432"/>
-                  </a:lnTo>
-                  <a:lnTo>
-                    <a:pt x="5801424" y="1200008"/>
-                  </a:lnTo>
-                  <a:lnTo>
-                    <a:pt x="5729802" y="1185213"/>
-                  </a:lnTo>
-                  <a:lnTo>
-                    <a:pt x="5658179" y="1170036"/>
-                  </a:lnTo>
-                  <a:lnTo>
-                    <a:pt x="5586557" y="1154468"/>
-                  </a:lnTo>
-                  <a:lnTo>
-                    <a:pt x="5514934" y="1138499"/>
-                  </a:lnTo>
-                  <a:lnTo>
-                    <a:pt x="5443311" y="1122118"/>
-                  </a:lnTo>
-                  <a:lnTo>
-                    <a:pt x="5371689" y="1105315"/>
-                  </a:lnTo>
-                  <a:lnTo>
-                    <a:pt x="5300066" y="1088079"/>
-                  </a:lnTo>
-                  <a:lnTo>
-                    <a:pt x="5228444" y="1070399"/>
-                  </a:lnTo>
-                  <a:lnTo>
-                    <a:pt x="5156821" y="1052263"/>
-                  </a:lnTo>
-                  <a:lnTo>
-                    <a:pt x="5085199" y="1033660"/>
-                  </a:lnTo>
-                  <a:lnTo>
-                    <a:pt x="5013576" y="1014577"/>
-                  </a:lnTo>
-                  <a:lnTo>
-                    <a:pt x="4941954" y="995003"/>
-                  </a:lnTo>
-                  <a:lnTo>
-                    <a:pt x="4870331" y="974924"/>
-                  </a:lnTo>
-                  <a:lnTo>
-                    <a:pt x="4798709" y="954328"/>
-                  </a:lnTo>
-                  <a:lnTo>
-                    <a:pt x="4727086" y="939531"/>
-                  </a:lnTo>
-                  <a:lnTo>
-                    <a:pt x="4655464" y="929941"/>
-                  </a:lnTo>
-                  <a:lnTo>
-                    <a:pt x="4583841" y="920240"/>
-                  </a:lnTo>
-                  <a:lnTo>
-                    <a:pt x="4512219" y="910427"/>
-                  </a:lnTo>
-                  <a:lnTo>
-                    <a:pt x="4440596" y="900502"/>
-                  </a:lnTo>
-                  <a:lnTo>
-                    <a:pt x="4368974" y="890463"/>
-                  </a:lnTo>
-                  <a:lnTo>
-                    <a:pt x="4297351" y="880308"/>
-                  </a:lnTo>
-                  <a:lnTo>
-                    <a:pt x="4225729" y="870037"/>
-                  </a:lnTo>
-                  <a:lnTo>
-                    <a:pt x="4154106" y="859647"/>
-                  </a:lnTo>
-                  <a:lnTo>
-                    <a:pt x="4082483" y="849139"/>
-                  </a:lnTo>
-                  <a:lnTo>
-                    <a:pt x="4010861" y="838509"/>
-                  </a:lnTo>
-                  <a:lnTo>
-                    <a:pt x="3939238" y="827757"/>
-                  </a:lnTo>
-                  <a:lnTo>
-                    <a:pt x="3867616" y="816882"/>
-                  </a:lnTo>
-                  <a:lnTo>
-                    <a:pt x="3795993" y="805882"/>
-                  </a:lnTo>
-                  <a:lnTo>
-                    <a:pt x="3724371" y="794755"/>
-                  </a:lnTo>
-                  <a:lnTo>
-                    <a:pt x="3652748" y="783501"/>
-                  </a:lnTo>
-                  <a:lnTo>
-                    <a:pt x="3581126" y="772117"/>
-                  </a:lnTo>
-                  <a:lnTo>
-                    <a:pt x="3509503" y="760603"/>
-                  </a:lnTo>
-                  <a:lnTo>
-                    <a:pt x="3437881" y="748956"/>
-                  </a:lnTo>
-                  <a:lnTo>
-                    <a:pt x="3366258" y="737175"/>
-                  </a:lnTo>
-                  <a:lnTo>
-                    <a:pt x="3294636" y="725259"/>
-                  </a:lnTo>
-                  <a:lnTo>
-                    <a:pt x="3223013" y="713206"/>
-                  </a:lnTo>
-                  <a:lnTo>
-                    <a:pt x="3151391" y="701014"/>
-                  </a:lnTo>
-                  <a:lnTo>
-                    <a:pt x="3079768" y="688682"/>
-                  </a:lnTo>
-                  <a:lnTo>
-                    <a:pt x="3008146" y="676209"/>
-                  </a:lnTo>
-                  <a:lnTo>
-                    <a:pt x="2936523" y="663592"/>
-                  </a:lnTo>
-                  <a:lnTo>
-                    <a:pt x="2864901" y="650830"/>
-                  </a:lnTo>
-                  <a:lnTo>
-                    <a:pt x="2793278" y="637922"/>
-                  </a:lnTo>
-                  <a:lnTo>
-                    <a:pt x="2721655" y="624865"/>
-                  </a:lnTo>
-                  <a:lnTo>
-                    <a:pt x="2650033" y="611658"/>
-                  </a:lnTo>
-                  <a:lnTo>
-                    <a:pt x="2578410" y="598300"/>
-                  </a:lnTo>
-                  <a:lnTo>
-                    <a:pt x="2506788" y="584788"/>
-                  </a:lnTo>
-                  <a:lnTo>
-                    <a:pt x="2435165" y="571120"/>
-                  </a:lnTo>
-                  <a:lnTo>
-                    <a:pt x="2363543" y="557296"/>
-                  </a:lnTo>
-                  <a:lnTo>
-                    <a:pt x="2291920" y="543313"/>
-                  </a:lnTo>
-                  <a:lnTo>
-                    <a:pt x="2220298" y="529169"/>
-                  </a:lnTo>
-                  <a:lnTo>
-                    <a:pt x="2148675" y="514862"/>
-                  </a:lnTo>
-                  <a:lnTo>
-                    <a:pt x="2077053" y="500391"/>
-                  </a:lnTo>
-                  <a:lnTo>
-                    <a:pt x="2005430" y="485754"/>
-                  </a:lnTo>
-                  <a:lnTo>
-                    <a:pt x="1933808" y="470949"/>
-                  </a:lnTo>
-                  <a:lnTo>
-                    <a:pt x="1862185" y="455973"/>
-                  </a:lnTo>
-                  <a:lnTo>
-                    <a:pt x="1790563" y="440826"/>
-                  </a:lnTo>
-                  <a:lnTo>
-                    <a:pt x="1718940" y="425504"/>
-                  </a:lnTo>
-                  <a:lnTo>
-                    <a:pt x="1647318" y="410006"/>
-                  </a:lnTo>
-                  <a:lnTo>
-                    <a:pt x="1575695" y="394330"/>
-                  </a:lnTo>
-                  <a:lnTo>
-                    <a:pt x="1504073" y="378474"/>
-                  </a:lnTo>
-                  <a:lnTo>
-                    <a:pt x="1432450" y="362436"/>
-                  </a:lnTo>
-                  <a:lnTo>
-                    <a:pt x="1360827" y="346214"/>
-                  </a:lnTo>
-                  <a:lnTo>
-                    <a:pt x="1289205" y="329805"/>
-                  </a:lnTo>
-                  <a:lnTo>
-                    <a:pt x="1217582" y="313207"/>
-                  </a:lnTo>
-                  <a:lnTo>
-                    <a:pt x="1145960" y="296419"/>
-                  </a:lnTo>
-                  <a:lnTo>
-                    <a:pt x="1074337" y="279438"/>
-                  </a:lnTo>
-                  <a:lnTo>
-                    <a:pt x="1002715" y="262261"/>
-                  </a:lnTo>
-                  <a:lnTo>
-                    <a:pt x="931092" y="244888"/>
-                  </a:lnTo>
-                  <a:lnTo>
-                    <a:pt x="859470" y="227314"/>
-                  </a:lnTo>
-                  <a:lnTo>
-                    <a:pt x="787847" y="209539"/>
-                  </a:lnTo>
-                  <a:lnTo>
-                    <a:pt x="716225" y="191560"/>
-                  </a:lnTo>
-                  <a:lnTo>
-                    <a:pt x="644602" y="173373"/>
-                  </a:lnTo>
-                  <a:lnTo>
-                    <a:pt x="572980" y="154978"/>
-                  </a:lnTo>
-                  <a:lnTo>
-                    <a:pt x="501357" y="136372"/>
-                  </a:lnTo>
-                  <a:lnTo>
-                    <a:pt x="429735" y="117551"/>
-                  </a:lnTo>
-                  <a:lnTo>
-                    <a:pt x="358112" y="98515"/>
-                  </a:lnTo>
-                  <a:lnTo>
-                    <a:pt x="286490" y="79259"/>
-                  </a:lnTo>
-                  <a:lnTo>
-                    <a:pt x="214867" y="59783"/>
-                  </a:lnTo>
-                  <a:lnTo>
-                    <a:pt x="143245" y="40082"/>
-                  </a:lnTo>
-                  <a:lnTo>
-                    <a:pt x="71622" y="20155"/>
+                    <a:pt x="7019007" y="1415133"/>
+                  </a:lnTo>
+                  <a:lnTo>
+                    <a:pt x="6947385" y="1405524"/>
+                  </a:lnTo>
+                  <a:lnTo>
+                    <a:pt x="6875762" y="1395665"/>
+                  </a:lnTo>
+                  <a:lnTo>
+                    <a:pt x="6804139" y="1385552"/>
+                  </a:lnTo>
+                  <a:lnTo>
+                    <a:pt x="6732517" y="1375176"/>
+                  </a:lnTo>
+                  <a:lnTo>
+                    <a:pt x="6660894" y="1364532"/>
+                  </a:lnTo>
+                  <a:lnTo>
+                    <a:pt x="6589272" y="1353613"/>
+                  </a:lnTo>
+                  <a:lnTo>
+                    <a:pt x="6517649" y="1342410"/>
+                  </a:lnTo>
+                  <a:lnTo>
+                    <a:pt x="6446027" y="1330918"/>
+                  </a:lnTo>
+                  <a:lnTo>
+                    <a:pt x="6374404" y="1319128"/>
+                  </a:lnTo>
+                  <a:lnTo>
+                    <a:pt x="6302782" y="1307033"/>
+                  </a:lnTo>
+                  <a:lnTo>
+                    <a:pt x="6231159" y="1294624"/>
+                  </a:lnTo>
+                  <a:lnTo>
+                    <a:pt x="6159537" y="1281894"/>
+                  </a:lnTo>
+                  <a:lnTo>
+                    <a:pt x="6087914" y="1268835"/>
+                  </a:lnTo>
+                  <a:lnTo>
+                    <a:pt x="6016292" y="1255437"/>
+                  </a:lnTo>
+                  <a:lnTo>
+                    <a:pt x="5944669" y="1241693"/>
+                  </a:lnTo>
+                  <a:lnTo>
+                    <a:pt x="5873047" y="1227592"/>
+                  </a:lnTo>
+                  <a:lnTo>
+                    <a:pt x="5801424" y="1213127"/>
+                  </a:lnTo>
+                  <a:lnTo>
+                    <a:pt x="5729802" y="1198287"/>
+                  </a:lnTo>
+                  <a:lnTo>
+                    <a:pt x="5658179" y="1183063"/>
+                  </a:lnTo>
+                  <a:lnTo>
+                    <a:pt x="5586557" y="1167444"/>
+                  </a:lnTo>
+                  <a:lnTo>
+                    <a:pt x="5514934" y="1151421"/>
+                  </a:lnTo>
+                  <a:lnTo>
+                    <a:pt x="5443311" y="1134984"/>
+                  </a:lnTo>
+                  <a:lnTo>
+                    <a:pt x="5371689" y="1118120"/>
+                  </a:lnTo>
+                  <a:lnTo>
+                    <a:pt x="5300066" y="1100820"/>
+                  </a:lnTo>
+                  <a:lnTo>
+                    <a:pt x="5228444" y="1083072"/>
+                  </a:lnTo>
+                  <a:lnTo>
+                    <a:pt x="5156821" y="1064865"/>
+                  </a:lnTo>
+                  <a:lnTo>
+                    <a:pt x="5085199" y="1046186"/>
+                  </a:lnTo>
+                  <a:lnTo>
+                    <a:pt x="5013576" y="1027023"/>
+                  </a:lnTo>
+                  <a:lnTo>
+                    <a:pt x="4941954" y="1007364"/>
+                  </a:lnTo>
+                  <a:lnTo>
+                    <a:pt x="4870331" y="987196"/>
+                  </a:lnTo>
+                  <a:lnTo>
+                    <a:pt x="4798709" y="966506"/>
+                  </a:lnTo>
+                  <a:lnTo>
+                    <a:pt x="4727086" y="951619"/>
+                  </a:lnTo>
+                  <a:lnTo>
+                    <a:pt x="4655464" y="941941"/>
+                  </a:lnTo>
+                  <a:lnTo>
+                    <a:pt x="4583841" y="932151"/>
+                  </a:lnTo>
+                  <a:lnTo>
+                    <a:pt x="4512219" y="922247"/>
+                  </a:lnTo>
+                  <a:lnTo>
+                    <a:pt x="4440596" y="912229"/>
+                  </a:lnTo>
+                  <a:lnTo>
+                    <a:pt x="4368974" y="902095"/>
+                  </a:lnTo>
+                  <a:lnTo>
+                    <a:pt x="4297351" y="891842"/>
+                  </a:lnTo>
+                  <a:lnTo>
+                    <a:pt x="4225729" y="881472"/>
+                  </a:lnTo>
+                  <a:lnTo>
+                    <a:pt x="4154106" y="870980"/>
+                  </a:lnTo>
+                  <a:lnTo>
+                    <a:pt x="4082483" y="860368"/>
+                  </a:lnTo>
+                  <a:lnTo>
+                    <a:pt x="4010861" y="849632"/>
+                  </a:lnTo>
+                  <a:lnTo>
+                    <a:pt x="3939238" y="838771"/>
+                  </a:lnTo>
+                  <a:lnTo>
+                    <a:pt x="3867616" y="827785"/>
+                  </a:lnTo>
+                  <a:lnTo>
+                    <a:pt x="3795993" y="816672"/>
+                  </a:lnTo>
+                  <a:lnTo>
+                    <a:pt x="3724371" y="805429"/>
+                  </a:lnTo>
+                  <a:lnTo>
+                    <a:pt x="3652748" y="794056"/>
+                  </a:lnTo>
+                  <a:lnTo>
+                    <a:pt x="3581126" y="782551"/>
+                  </a:lnTo>
+                  <a:lnTo>
+                    <a:pt x="3509503" y="770913"/>
+                  </a:lnTo>
+                  <a:lnTo>
+                    <a:pt x="3437881" y="759140"/>
+                  </a:lnTo>
+                  <a:lnTo>
+                    <a:pt x="3366258" y="747231"/>
+                  </a:lnTo>
+                  <a:lnTo>
+                    <a:pt x="3294636" y="735183"/>
+                  </a:lnTo>
+                  <a:lnTo>
+                    <a:pt x="3223013" y="722996"/>
+                  </a:lnTo>
+                  <a:lnTo>
+                    <a:pt x="3151391" y="710667"/>
+                  </a:lnTo>
+                  <a:lnTo>
+                    <a:pt x="3079768" y="698195"/>
+                  </a:lnTo>
+                  <a:lnTo>
+                    <a:pt x="3008146" y="685579"/>
+                  </a:lnTo>
+                  <a:lnTo>
+                    <a:pt x="2936523" y="672816"/>
+                  </a:lnTo>
+                  <a:lnTo>
+                    <a:pt x="2864901" y="659906"/>
+                  </a:lnTo>
+                  <a:lnTo>
+                    <a:pt x="2793278" y="646846"/>
+                  </a:lnTo>
+                  <a:lnTo>
+                    <a:pt x="2721655" y="633634"/>
+                  </a:lnTo>
+                  <a:lnTo>
+                    <a:pt x="2650033" y="620269"/>
+                  </a:lnTo>
+                  <a:lnTo>
+                    <a:pt x="2578410" y="606749"/>
+                  </a:lnTo>
+                  <a:lnTo>
+                    <a:pt x="2506788" y="593073"/>
+                  </a:lnTo>
+                  <a:lnTo>
+                    <a:pt x="2435165" y="579237"/>
+                  </a:lnTo>
+                  <a:lnTo>
+                    <a:pt x="2363543" y="565242"/>
+                  </a:lnTo>
+                  <a:lnTo>
+                    <a:pt x="2291920" y="551084"/>
+                  </a:lnTo>
+                  <a:lnTo>
+                    <a:pt x="2220298" y="536762"/>
+                  </a:lnTo>
+                  <a:lnTo>
+                    <a:pt x="2148675" y="522274"/>
+                  </a:lnTo>
+                  <a:lnTo>
+                    <a:pt x="2077053" y="507618"/>
+                  </a:lnTo>
+                  <a:lnTo>
+                    <a:pt x="2005430" y="492791"/>
+                  </a:lnTo>
+                  <a:lnTo>
+                    <a:pt x="1933808" y="477793"/>
+                  </a:lnTo>
+                  <a:lnTo>
+                    <a:pt x="1862185" y="462622"/>
+                  </a:lnTo>
+                  <a:lnTo>
+                    <a:pt x="1790563" y="447274"/>
+                  </a:lnTo>
+                  <a:lnTo>
+                    <a:pt x="1718940" y="431748"/>
+                  </a:lnTo>
+                  <a:lnTo>
+                    <a:pt x="1647318" y="416042"/>
+                  </a:lnTo>
+                  <a:lnTo>
+                    <a:pt x="1575695" y="400154"/>
+                  </a:lnTo>
+                  <a:lnTo>
+                    <a:pt x="1504073" y="384082"/>
+                  </a:lnTo>
+                  <a:lnTo>
+                    <a:pt x="1432450" y="367824"/>
+                  </a:lnTo>
+                  <a:lnTo>
+                    <a:pt x="1360827" y="351377"/>
+                  </a:lnTo>
+                  <a:lnTo>
+                    <a:pt x="1289205" y="334739"/>
+                  </a:lnTo>
+                  <a:lnTo>
+                    <a:pt x="1217582" y="317908"/>
+                  </a:lnTo>
+                  <a:lnTo>
+                    <a:pt x="1145960" y="300883"/>
+                  </a:lnTo>
+                  <a:lnTo>
+                    <a:pt x="1074337" y="283659"/>
+                  </a:lnTo>
+                  <a:lnTo>
+                    <a:pt x="1002715" y="266236"/>
+                  </a:lnTo>
+                  <a:lnTo>
+                    <a:pt x="931092" y="248612"/>
+                  </a:lnTo>
+                  <a:lnTo>
+                    <a:pt x="859470" y="230782"/>
+                  </a:lnTo>
+                  <a:lnTo>
+                    <a:pt x="787847" y="212746"/>
+                  </a:lnTo>
+                  <a:lnTo>
+                    <a:pt x="716225" y="194501"/>
+                  </a:lnTo>
+                  <a:lnTo>
+                    <a:pt x="644602" y="176044"/>
+                  </a:lnTo>
+                  <a:lnTo>
+                    <a:pt x="572980" y="157374"/>
+                  </a:lnTo>
+                  <a:lnTo>
+                    <a:pt x="501357" y="138486"/>
+                  </a:lnTo>
+                  <a:lnTo>
+                    <a:pt x="429735" y="119380"/>
+                  </a:lnTo>
+                  <a:lnTo>
+                    <a:pt x="358112" y="100052"/>
+                  </a:lnTo>
+                  <a:lnTo>
+                    <a:pt x="286490" y="80501"/>
+                  </a:lnTo>
+                  <a:lnTo>
+                    <a:pt x="214867" y="60722"/>
+                  </a:lnTo>
+                  <a:lnTo>
+                    <a:pt x="143245" y="40714"/>
+                  </a:lnTo>
+                  <a:lnTo>
+                    <a:pt x="71622" y="20474"/>
                   </a:lnTo>
                   <a:lnTo>
                     <a:pt x="0" y="0"/>
@@ -4266,312 +4266,312 @@
           </p:nvSpPr>
           <p:spPr>
             <a:xfrm>
-              <a:off x="1172049" y="2728880"/>
-              <a:ext cx="7090630" cy="2372435"/>
+              <a:off x="1172049" y="2707988"/>
+              <a:ext cx="7090630" cy="2394962"/>
             </a:xfrm>
             <a:custGeom>
               <a:avLst/>
               <a:pathLst>
-                <a:path w="7090630" h="2372435">
+                <a:path w="7090630" h="2394962">
                   <a:moveTo>
                     <a:pt x="0" y="0"/>
                   </a:moveTo>
                   <a:lnTo>
-                    <a:pt x="71622" y="51664"/>
-                  </a:lnTo>
-                  <a:lnTo>
-                    <a:pt x="143245" y="102385"/>
-                  </a:lnTo>
-                  <a:lnTo>
-                    <a:pt x="214867" y="152179"/>
-                  </a:lnTo>
-                  <a:lnTo>
-                    <a:pt x="286490" y="201064"/>
-                  </a:lnTo>
-                  <a:lnTo>
-                    <a:pt x="358112" y="249056"/>
-                  </a:lnTo>
-                  <a:lnTo>
-                    <a:pt x="429735" y="296171"/>
-                  </a:lnTo>
-                  <a:lnTo>
-                    <a:pt x="501357" y="342425"/>
-                  </a:lnTo>
-                  <a:lnTo>
-                    <a:pt x="572980" y="387835"/>
-                  </a:lnTo>
-                  <a:lnTo>
-                    <a:pt x="644602" y="432415"/>
-                  </a:lnTo>
-                  <a:lnTo>
-                    <a:pt x="716225" y="476181"/>
-                  </a:lnTo>
-                  <a:lnTo>
-                    <a:pt x="787847" y="519147"/>
-                  </a:lnTo>
-                  <a:lnTo>
-                    <a:pt x="859470" y="561329"/>
-                  </a:lnTo>
-                  <a:lnTo>
-                    <a:pt x="931092" y="602740"/>
-                  </a:lnTo>
-                  <a:lnTo>
-                    <a:pt x="1002715" y="643394"/>
-                  </a:lnTo>
-                  <a:lnTo>
-                    <a:pt x="1074337" y="683306"/>
-                  </a:lnTo>
-                  <a:lnTo>
-                    <a:pt x="1145960" y="722489"/>
-                  </a:lnTo>
-                  <a:lnTo>
-                    <a:pt x="1217582" y="760956"/>
-                  </a:lnTo>
-                  <a:lnTo>
-                    <a:pt x="1289205" y="798721"/>
-                  </a:lnTo>
-                  <a:lnTo>
-                    <a:pt x="1360827" y="835795"/>
-                  </a:lnTo>
-                  <a:lnTo>
-                    <a:pt x="1432450" y="872193"/>
-                  </a:lnTo>
-                  <a:lnTo>
-                    <a:pt x="1504073" y="907925"/>
-                  </a:lnTo>
-                  <a:lnTo>
-                    <a:pt x="1575695" y="943005"/>
-                  </a:lnTo>
-                  <a:lnTo>
-                    <a:pt x="1647318" y="977444"/>
-                  </a:lnTo>
-                  <a:lnTo>
-                    <a:pt x="1718940" y="1011254"/>
-                  </a:lnTo>
-                  <a:lnTo>
-                    <a:pt x="1790563" y="1044447"/>
-                  </a:lnTo>
-                  <a:lnTo>
-                    <a:pt x="1862185" y="1077033"/>
-                  </a:lnTo>
-                  <a:lnTo>
-                    <a:pt x="1933808" y="1109024"/>
-                  </a:lnTo>
-                  <a:lnTo>
-                    <a:pt x="2005430" y="1140430"/>
-                  </a:lnTo>
-                  <a:lnTo>
-                    <a:pt x="2077053" y="1171263"/>
-                  </a:lnTo>
-                  <a:lnTo>
-                    <a:pt x="2148675" y="1201532"/>
-                  </a:lnTo>
-                  <a:lnTo>
-                    <a:pt x="2220298" y="1231249"/>
-                  </a:lnTo>
-                  <a:lnTo>
-                    <a:pt x="2291920" y="1260423"/>
-                  </a:lnTo>
-                  <a:lnTo>
-                    <a:pt x="2363543" y="1289064"/>
-                  </a:lnTo>
-                  <a:lnTo>
-                    <a:pt x="2435165" y="1317182"/>
-                  </a:lnTo>
-                  <a:lnTo>
-                    <a:pt x="2506788" y="1344786"/>
-                  </a:lnTo>
-                  <a:lnTo>
-                    <a:pt x="2578410" y="1371886"/>
-                  </a:lnTo>
-                  <a:lnTo>
-                    <a:pt x="2650033" y="1398491"/>
-                  </a:lnTo>
-                  <a:lnTo>
-                    <a:pt x="2721655" y="1424610"/>
-                  </a:lnTo>
-                  <a:lnTo>
-                    <a:pt x="2793278" y="1450251"/>
-                  </a:lnTo>
-                  <a:lnTo>
-                    <a:pt x="2864901" y="1475425"/>
-                  </a:lnTo>
-                  <a:lnTo>
-                    <a:pt x="2936523" y="1500139"/>
-                  </a:lnTo>
-                  <a:lnTo>
-                    <a:pt x="3008146" y="1524401"/>
-                  </a:lnTo>
-                  <a:lnTo>
-                    <a:pt x="3079768" y="1548220"/>
-                  </a:lnTo>
-                  <a:lnTo>
-                    <a:pt x="3151391" y="1571604"/>
-                  </a:lnTo>
-                  <a:lnTo>
-                    <a:pt x="3223013" y="1594560"/>
-                  </a:lnTo>
-                  <a:lnTo>
-                    <a:pt x="3294636" y="1617098"/>
-                  </a:lnTo>
-                  <a:lnTo>
-                    <a:pt x="3366258" y="1639224"/>
-                  </a:lnTo>
-                  <a:lnTo>
-                    <a:pt x="3437881" y="1660945"/>
-                  </a:lnTo>
-                  <a:lnTo>
-                    <a:pt x="3509503" y="1682270"/>
-                  </a:lnTo>
-                  <a:lnTo>
-                    <a:pt x="3581126" y="1703205"/>
-                  </a:lnTo>
-                  <a:lnTo>
-                    <a:pt x="3652748" y="1723758"/>
-                  </a:lnTo>
-                  <a:lnTo>
-                    <a:pt x="3724371" y="1743935"/>
-                  </a:lnTo>
-                  <a:lnTo>
-                    <a:pt x="3795993" y="1763744"/>
-                  </a:lnTo>
-                  <a:lnTo>
-                    <a:pt x="3867616" y="1783191"/>
-                  </a:lnTo>
-                  <a:lnTo>
-                    <a:pt x="3939238" y="1802283"/>
-                  </a:lnTo>
-                  <a:lnTo>
-                    <a:pt x="4010861" y="1821026"/>
-                  </a:lnTo>
-                  <a:lnTo>
-                    <a:pt x="4082483" y="1839427"/>
-                  </a:lnTo>
-                  <a:lnTo>
-                    <a:pt x="4154106" y="1857491"/>
-                  </a:lnTo>
-                  <a:lnTo>
-                    <a:pt x="4225729" y="1875226"/>
-                  </a:lnTo>
-                  <a:lnTo>
-                    <a:pt x="4297351" y="1892636"/>
-                  </a:lnTo>
-                  <a:lnTo>
-                    <a:pt x="4368974" y="1909729"/>
-                  </a:lnTo>
-                  <a:lnTo>
-                    <a:pt x="4440596" y="1926509"/>
-                  </a:lnTo>
-                  <a:lnTo>
-                    <a:pt x="4512219" y="1942983"/>
-                  </a:lnTo>
-                  <a:lnTo>
-                    <a:pt x="4583841" y="1959156"/>
-                  </a:lnTo>
-                  <a:lnTo>
-                    <a:pt x="4655464" y="1975034"/>
-                  </a:lnTo>
-                  <a:lnTo>
-                    <a:pt x="4727086" y="1990621"/>
-                  </a:lnTo>
-                  <a:lnTo>
-                    <a:pt x="4798709" y="2005924"/>
-                  </a:lnTo>
-                  <a:lnTo>
-                    <a:pt x="4870331" y="2020947"/>
-                  </a:lnTo>
-                  <a:lnTo>
-                    <a:pt x="4941954" y="2035696"/>
-                  </a:lnTo>
-                  <a:lnTo>
-                    <a:pt x="5013576" y="2050175"/>
-                  </a:lnTo>
-                  <a:lnTo>
-                    <a:pt x="5085199" y="2064390"/>
-                  </a:lnTo>
-                  <a:lnTo>
-                    <a:pt x="5156821" y="2078346"/>
-                  </a:lnTo>
-                  <a:lnTo>
-                    <a:pt x="5228444" y="2092046"/>
-                  </a:lnTo>
-                  <a:lnTo>
-                    <a:pt x="5300066" y="2105496"/>
-                  </a:lnTo>
-                  <a:lnTo>
-                    <a:pt x="5371689" y="2118700"/>
-                  </a:lnTo>
-                  <a:lnTo>
-                    <a:pt x="5443311" y="2131663"/>
-                  </a:lnTo>
-                  <a:lnTo>
-                    <a:pt x="5514934" y="2144390"/>
-                  </a:lnTo>
-                  <a:lnTo>
-                    <a:pt x="5586557" y="2156884"/>
-                  </a:lnTo>
-                  <a:lnTo>
-                    <a:pt x="5658179" y="2169150"/>
-                  </a:lnTo>
-                  <a:lnTo>
-                    <a:pt x="5729802" y="2181191"/>
-                  </a:lnTo>
-                  <a:lnTo>
-                    <a:pt x="5801424" y="2193013"/>
-                  </a:lnTo>
-                  <a:lnTo>
-                    <a:pt x="5873047" y="2204619"/>
-                  </a:lnTo>
-                  <a:lnTo>
-                    <a:pt x="5944669" y="2216012"/>
-                  </a:lnTo>
-                  <a:lnTo>
-                    <a:pt x="6016292" y="2227198"/>
-                  </a:lnTo>
-                  <a:lnTo>
-                    <a:pt x="6087914" y="2238179"/>
-                  </a:lnTo>
-                  <a:lnTo>
-                    <a:pt x="6159537" y="2248960"/>
-                  </a:lnTo>
-                  <a:lnTo>
-                    <a:pt x="6231159" y="2259544"/>
-                  </a:lnTo>
-                  <a:lnTo>
-                    <a:pt x="6302782" y="2269934"/>
-                  </a:lnTo>
-                  <a:lnTo>
-                    <a:pt x="6374404" y="2280135"/>
-                  </a:lnTo>
-                  <a:lnTo>
-                    <a:pt x="6446027" y="2290149"/>
-                  </a:lnTo>
-                  <a:lnTo>
-                    <a:pt x="6517649" y="2299981"/>
-                  </a:lnTo>
-                  <a:lnTo>
-                    <a:pt x="6589272" y="2309633"/>
-                  </a:lnTo>
-                  <a:lnTo>
-                    <a:pt x="6660894" y="2319108"/>
-                  </a:lnTo>
-                  <a:lnTo>
-                    <a:pt x="6732517" y="2328410"/>
-                  </a:lnTo>
-                  <a:lnTo>
-                    <a:pt x="6804139" y="2337543"/>
-                  </a:lnTo>
-                  <a:lnTo>
-                    <a:pt x="6875762" y="2346509"/>
-                  </a:lnTo>
-                  <a:lnTo>
-                    <a:pt x="6947385" y="2355311"/>
-                  </a:lnTo>
-                  <a:lnTo>
-                    <a:pt x="7019007" y="2363952"/>
-                  </a:lnTo>
-                  <a:lnTo>
-                    <a:pt x="7090630" y="2372435"/>
+                    <a:pt x="71622" y="52355"/>
+                  </a:lnTo>
+                  <a:lnTo>
+                    <a:pt x="143245" y="103749"/>
+                  </a:lnTo>
+                  <a:lnTo>
+                    <a:pt x="214867" y="154198"/>
+                  </a:lnTo>
+                  <a:lnTo>
+                    <a:pt x="286490" y="203720"/>
+                  </a:lnTo>
+                  <a:lnTo>
+                    <a:pt x="358112" y="252332"/>
+                  </a:lnTo>
+                  <a:lnTo>
+                    <a:pt x="429735" y="300051"/>
+                  </a:lnTo>
+                  <a:lnTo>
+                    <a:pt x="501357" y="346893"/>
+                  </a:lnTo>
+                  <a:lnTo>
+                    <a:pt x="572980" y="392874"/>
+                  </a:lnTo>
+                  <a:lnTo>
+                    <a:pt x="644602" y="438011"/>
+                  </a:lnTo>
+                  <a:lnTo>
+                    <a:pt x="716225" y="482318"/>
+                  </a:lnTo>
+                  <a:lnTo>
+                    <a:pt x="787847" y="525811"/>
+                  </a:lnTo>
+                  <a:lnTo>
+                    <a:pt x="859470" y="568504"/>
+                  </a:lnTo>
+                  <a:lnTo>
+                    <a:pt x="931092" y="610413"/>
+                  </a:lnTo>
+                  <a:lnTo>
+                    <a:pt x="1002715" y="651553"/>
+                  </a:lnTo>
+                  <a:lnTo>
+                    <a:pt x="1074337" y="691936"/>
+                  </a:lnTo>
+                  <a:lnTo>
+                    <a:pt x="1145960" y="731577"/>
+                  </a:lnTo>
+                  <a:lnTo>
+                    <a:pt x="1217582" y="770490"/>
+                  </a:lnTo>
+                  <a:lnTo>
+                    <a:pt x="1289205" y="808687"/>
+                  </a:lnTo>
+                  <a:lnTo>
+                    <a:pt x="1360827" y="846183"/>
+                  </a:lnTo>
+                  <a:lnTo>
+                    <a:pt x="1432450" y="882990"/>
+                  </a:lnTo>
+                  <a:lnTo>
+                    <a:pt x="1504073" y="919120"/>
+                  </a:lnTo>
+                  <a:lnTo>
+                    <a:pt x="1575695" y="954587"/>
+                  </a:lnTo>
+                  <a:lnTo>
+                    <a:pt x="1647318" y="989402"/>
+                  </a:lnTo>
+                  <a:lnTo>
+                    <a:pt x="1718940" y="1023577"/>
+                  </a:lnTo>
+                  <a:lnTo>
+                    <a:pt x="1790563" y="1057124"/>
+                  </a:lnTo>
+                  <a:lnTo>
+                    <a:pt x="1862185" y="1090055"/>
+                  </a:lnTo>
+                  <a:lnTo>
+                    <a:pt x="1933808" y="1122381"/>
+                  </a:lnTo>
+                  <a:lnTo>
+                    <a:pt x="2005430" y="1154112"/>
+                  </a:lnTo>
+                  <a:lnTo>
+                    <a:pt x="2077053" y="1185261"/>
+                  </a:lnTo>
+                  <a:lnTo>
+                    <a:pt x="2148675" y="1215837"/>
+                  </a:lnTo>
+                  <a:lnTo>
+                    <a:pt x="2220298" y="1245851"/>
+                  </a:lnTo>
+                  <a:lnTo>
+                    <a:pt x="2291920" y="1275314"/>
+                  </a:lnTo>
+                  <a:lnTo>
+                    <a:pt x="2363543" y="1304236"/>
+                  </a:lnTo>
+                  <a:lnTo>
+                    <a:pt x="2435165" y="1332626"/>
+                  </a:lnTo>
+                  <a:lnTo>
+                    <a:pt x="2506788" y="1360494"/>
+                  </a:lnTo>
+                  <a:lnTo>
+                    <a:pt x="2578410" y="1387850"/>
+                  </a:lnTo>
+                  <a:lnTo>
+                    <a:pt x="2650033" y="1414704"/>
+                  </a:lnTo>
+                  <a:lnTo>
+                    <a:pt x="2721655" y="1441064"/>
+                  </a:lnTo>
+                  <a:lnTo>
+                    <a:pt x="2793278" y="1466940"/>
+                  </a:lnTo>
+                  <a:lnTo>
+                    <a:pt x="2864901" y="1492340"/>
+                  </a:lnTo>
+                  <a:lnTo>
+                    <a:pt x="2936523" y="1517274"/>
+                  </a:lnTo>
+                  <a:lnTo>
+                    <a:pt x="3008146" y="1541749"/>
+                  </a:lnTo>
+                  <a:lnTo>
+                    <a:pt x="3079768" y="1565775"/>
+                  </a:lnTo>
+                  <a:lnTo>
+                    <a:pt x="3151391" y="1589359"/>
+                  </a:lnTo>
+                  <a:lnTo>
+                    <a:pt x="3223013" y="1612510"/>
+                  </a:lnTo>
+                  <a:lnTo>
+                    <a:pt x="3294636" y="1635235"/>
+                  </a:lnTo>
+                  <a:lnTo>
+                    <a:pt x="3366258" y="1657543"/>
+                  </a:lnTo>
+                  <a:lnTo>
+                    <a:pt x="3437881" y="1679441"/>
+                  </a:lnTo>
+                  <a:lnTo>
+                    <a:pt x="3509503" y="1700937"/>
+                  </a:lnTo>
+                  <a:lnTo>
+                    <a:pt x="3581126" y="1722038"/>
+                  </a:lnTo>
+                  <a:lnTo>
+                    <a:pt x="3652748" y="1742750"/>
+                  </a:lnTo>
+                  <a:lnTo>
+                    <a:pt x="3724371" y="1763083"/>
+                  </a:lnTo>
+                  <a:lnTo>
+                    <a:pt x="3795993" y="1783041"/>
+                  </a:lnTo>
+                  <a:lnTo>
+                    <a:pt x="3867616" y="1802633"/>
+                  </a:lnTo>
+                  <a:lnTo>
+                    <a:pt x="3939238" y="1821865"/>
+                  </a:lnTo>
+                  <a:lnTo>
+                    <a:pt x="4010861" y="1840744"/>
+                  </a:lnTo>
+                  <a:lnTo>
+                    <a:pt x="4082483" y="1859275"/>
+                  </a:lnTo>
+                  <a:lnTo>
+                    <a:pt x="4154106" y="1877466"/>
+                  </a:lnTo>
+                  <a:lnTo>
+                    <a:pt x="4225729" y="1895323"/>
+                  </a:lnTo>
+                  <a:lnTo>
+                    <a:pt x="4297351" y="1912852"/>
+                  </a:lnTo>
+                  <a:lnTo>
+                    <a:pt x="4368974" y="1930059"/>
+                  </a:lnTo>
+                  <a:lnTo>
+                    <a:pt x="4440596" y="1946949"/>
+                  </a:lnTo>
+                  <a:lnTo>
+                    <a:pt x="4512219" y="1963529"/>
+                  </a:lnTo>
+                  <a:lnTo>
+                    <a:pt x="4583841" y="1979805"/>
+                  </a:lnTo>
+                  <a:lnTo>
+                    <a:pt x="4655464" y="1995781"/>
+                  </a:lnTo>
+                  <a:lnTo>
+                    <a:pt x="4727086" y="2011464"/>
+                  </a:lnTo>
+                  <a:lnTo>
+                    <a:pt x="4798709" y="2026858"/>
+                  </a:lnTo>
+                  <a:lnTo>
+                    <a:pt x="4870331" y="2041970"/>
+                  </a:lnTo>
+                  <a:lnTo>
+                    <a:pt x="4941954" y="2056804"/>
+                  </a:lnTo>
+                  <a:lnTo>
+                    <a:pt x="5013576" y="2071366"/>
+                  </a:lnTo>
+                  <a:lnTo>
+                    <a:pt x="5085199" y="2085660"/>
+                  </a:lnTo>
+                  <a:lnTo>
+                    <a:pt x="5156821" y="2099691"/>
+                  </a:lnTo>
+                  <a:lnTo>
+                    <a:pt x="5228444" y="2113464"/>
+                  </a:lnTo>
+                  <a:lnTo>
+                    <a:pt x="5300066" y="2126985"/>
+                  </a:lnTo>
+                  <a:lnTo>
+                    <a:pt x="5371689" y="2140257"/>
+                  </a:lnTo>
+                  <a:lnTo>
+                    <a:pt x="5443311" y="2153285"/>
+                  </a:lnTo>
+                  <a:lnTo>
+                    <a:pt x="5514934" y="2166073"/>
+                  </a:lnTo>
+                  <a:lnTo>
+                    <a:pt x="5586557" y="2178627"/>
+                  </a:lnTo>
+                  <a:lnTo>
+                    <a:pt x="5658179" y="2190950"/>
+                  </a:lnTo>
+                  <a:lnTo>
+                    <a:pt x="5729802" y="2203047"/>
+                  </a:lnTo>
+                  <a:lnTo>
+                    <a:pt x="5801424" y="2214921"/>
+                  </a:lnTo>
+                  <a:lnTo>
+                    <a:pt x="5873047" y="2226577"/>
+                  </a:lnTo>
+                  <a:lnTo>
+                    <a:pt x="5944669" y="2238019"/>
+                  </a:lnTo>
+                  <a:lnTo>
+                    <a:pt x="6016292" y="2249250"/>
+                  </a:lnTo>
+                  <a:lnTo>
+                    <a:pt x="6087914" y="2260276"/>
+                  </a:lnTo>
+                  <a:lnTo>
+                    <a:pt x="6159537" y="2271098"/>
+                  </a:lnTo>
+                  <a:lnTo>
+                    <a:pt x="6231159" y="2281722"/>
+                  </a:lnTo>
+                  <a:lnTo>
+                    <a:pt x="6302782" y="2292151"/>
+                  </a:lnTo>
+                  <a:lnTo>
+                    <a:pt x="6374404" y="2302388"/>
+                  </a:lnTo>
+                  <a:lnTo>
+                    <a:pt x="6446027" y="2312437"/>
+                  </a:lnTo>
+                  <a:lnTo>
+                    <a:pt x="6517649" y="2322301"/>
+                  </a:lnTo>
+                  <a:lnTo>
+                    <a:pt x="6589272" y="2331984"/>
+                  </a:lnTo>
+                  <a:lnTo>
+                    <a:pt x="6660894" y="2341489"/>
+                  </a:lnTo>
+                  <a:lnTo>
+                    <a:pt x="6732517" y="2350819"/>
+                  </a:lnTo>
+                  <a:lnTo>
+                    <a:pt x="6804139" y="2359978"/>
+                  </a:lnTo>
+                  <a:lnTo>
+                    <a:pt x="6875762" y="2368969"/>
+                  </a:lnTo>
+                  <a:lnTo>
+                    <a:pt x="6947385" y="2377794"/>
+                  </a:lnTo>
+                  <a:lnTo>
+                    <a:pt x="7019007" y="2386458"/>
+                  </a:lnTo>
+                  <a:lnTo>
+                    <a:pt x="7090630" y="2394962"/>
                   </a:lnTo>
                 </a:path>
               </a:pathLst>
@@ -5311,7 +5311,7 @@
                   <a:latin typeface="Helvetica"/>
                   <a:cs typeface="Helvetica"/>
                 </a:rPr>
-                <a:t>subHR per 10 mL/min decline: 1.25 (1.15-1.36), p_Bonf = &lt;0.001 (n = 6)  |  per IQR decline (Δ = 23.3): 1.68 (1.38-2.05)  |  IQR: [-12.8, 10.5]</a:t>
+                <a:t>subHR per 10 mL/min decline: 1.25 (1.15-1.36), p_Bonf = &lt;0.001 (n = 6)  |  per IQR decline (Δ = 23.3): 1.69 (1.39-2.06)  |  IQR: [-12.8, 10.5]</a:t>
               </a:r>
             </a:p>
           </p:txBody>
